--- a/Term 5/MicroProcessor/Slides/Micro-Lec12-PWM-Recorded.pptx
+++ b/Term 5/MicroProcessor/Slides/Micro-Lec12-PWM-Recorded.pptx
@@ -122,7 +122,7 @@
   </p:defaultTextStyle>
   <p:extLst>
     <p:ext uri="{EFAFB233-063F-42B5-8137-9DF3F51BA10A}">
-      <p15:sldGuideLst xmlns="" xmlns:p15="http://schemas.microsoft.com/office/powerpoint/2012/main">
+      <p15:sldGuideLst xmlns:p15="http://schemas.microsoft.com/office/powerpoint/2012/main">
         <p15:guide id="1" orient="horz" pos="2160">
           <p15:clr>
             <a:srgbClr val="A4A3A4"/>
@@ -136,7 +136,7 @@
       </p15:sldGuideLst>
     </p:ext>
     <p:ext uri="{2D200454-40CA-4A62-9FC3-DE9A4176ACB9}">
-      <p15:notesGuideLst xmlns="" xmlns:p15="http://schemas.microsoft.com/office/powerpoint/2012/main">
+      <p15:notesGuideLst xmlns:p15="http://schemas.microsoft.com/office/powerpoint/2012/main">
         <p15:guide id="1" orient="horz" pos="2880">
           <p15:clr>
             <a:srgbClr val="A4A3A4"/>
@@ -245,7 +245,7 @@
           <a:p>
             <a:fld id="{33A2C78E-1418-4D80-911C-2F94FB99BDBC}" type="datetimeFigureOut">
               <a:rPr lang="en-US" smtClean="0"/>
-              <a:t>8/19/2024</a:t>
+              <a:t>12/27/2025</a:t>
             </a:fld>
             <a:endParaRPr lang="en-US"/>
           </a:p>
@@ -410,7 +410,7 @@
           <a:p>
             <a:fld id="{1479DE93-9629-4701-8E4D-06B6CC932194}" type="datetimeFigureOut">
               <a:rPr lang="en-US" smtClean="0"/>
-              <a:t>8/19/2024</a:t>
+              <a:t>12/27/2025</a:t>
             </a:fld>
             <a:endParaRPr lang="en-US"/>
           </a:p>
@@ -474,38 +474,37 @@
           <a:p>
             <a:pPr lvl="0"/>
             <a:r>
-              <a:rPr lang="en-US" smtClean="0"/>
+              <a:rPr lang="en-US"/>
               <a:t>Click to edit Master text styles</a:t>
             </a:r>
           </a:p>
           <a:p>
             <a:pPr lvl="1"/>
             <a:r>
-              <a:rPr lang="en-US" smtClean="0"/>
+              <a:rPr lang="en-US"/>
               <a:t>Second level</a:t>
             </a:r>
           </a:p>
           <a:p>
             <a:pPr lvl="2"/>
             <a:r>
-              <a:rPr lang="en-US" smtClean="0"/>
+              <a:rPr lang="en-US"/>
               <a:t>Third level</a:t>
             </a:r>
           </a:p>
           <a:p>
             <a:pPr lvl="3"/>
             <a:r>
-              <a:rPr lang="en-US" smtClean="0"/>
+              <a:rPr lang="en-US"/>
               <a:t>Fourth level</a:t>
             </a:r>
           </a:p>
           <a:p>
             <a:pPr lvl="4"/>
             <a:r>
-              <a:rPr lang="en-US" smtClean="0"/>
+              <a:rPr lang="en-US"/>
               <a:t>Fifth level</a:t>
             </a:r>
-            <a:endParaRPr lang="en-US"/>
           </a:p>
         </p:txBody>
       </p:sp>
@@ -716,10 +715,9 @@
           <a:lstStyle/>
           <a:p>
             <a:r>
-              <a:rPr lang="en-US" smtClean="0"/>
+              <a:rPr lang="en-US"/>
               <a:t>Click to edit Master title style</a:t>
             </a:r>
-            <a:endParaRPr lang="en-US"/>
           </a:p>
         </p:txBody>
       </p:sp>
@@ -835,10 +833,9 @@
           </a:lstStyle>
           <a:p>
             <a:r>
-              <a:rPr lang="en-US" smtClean="0"/>
+              <a:rPr lang="en-US"/>
               <a:t>Click to edit Master subtitle style</a:t>
             </a:r>
-            <a:endParaRPr lang="en-US"/>
           </a:p>
         </p:txBody>
       </p:sp>
@@ -866,7 +863,7 @@
           <a:p>
             <a:fld id="{40281FD0-B2DB-4ECA-ADAD-7146D3D1D0F9}" type="datetime1">
               <a:rPr lang="en-US" smtClean="0"/>
-              <a:t>8/19/2024</a:t>
+              <a:t>12/27/2025</a:t>
             </a:fld>
             <a:endParaRPr lang="en-US" dirty="0"/>
           </a:p>
@@ -888,7 +885,7 @@
           <a:lstStyle/>
           <a:p>
             <a:r>
-              <a:rPr lang="en-US" smtClean="0"/>
+              <a:rPr lang="en-US"/>
               <a:t>Memory-Mapped SPM</a:t>
             </a:r>
             <a:endParaRPr lang="en-US" dirty="0"/>
@@ -967,10 +964,9 @@
           <a:lstStyle/>
           <a:p>
             <a:r>
-              <a:rPr lang="en-US" smtClean="0"/>
+              <a:rPr lang="en-US"/>
               <a:t>Click to edit Master title style</a:t>
             </a:r>
-            <a:endParaRPr lang="en-US"/>
           </a:p>
         </p:txBody>
       </p:sp>
@@ -991,38 +987,37 @@
           <a:p>
             <a:pPr lvl="0"/>
             <a:r>
-              <a:rPr lang="en-US" smtClean="0"/>
+              <a:rPr lang="en-US"/>
               <a:t>Click to edit Master text styles</a:t>
             </a:r>
           </a:p>
           <a:p>
             <a:pPr lvl="1"/>
             <a:r>
-              <a:rPr lang="en-US" smtClean="0"/>
+              <a:rPr lang="en-US"/>
               <a:t>Second level</a:t>
             </a:r>
           </a:p>
           <a:p>
             <a:pPr lvl="2"/>
             <a:r>
-              <a:rPr lang="en-US" smtClean="0"/>
+              <a:rPr lang="en-US"/>
               <a:t>Third level</a:t>
             </a:r>
           </a:p>
           <a:p>
             <a:pPr lvl="3"/>
             <a:r>
-              <a:rPr lang="en-US" smtClean="0"/>
+              <a:rPr lang="en-US"/>
               <a:t>Fourth level</a:t>
             </a:r>
           </a:p>
           <a:p>
             <a:pPr lvl="4"/>
             <a:r>
-              <a:rPr lang="en-US" smtClean="0"/>
+              <a:rPr lang="en-US"/>
               <a:t>Fifth level</a:t>
             </a:r>
-            <a:endParaRPr lang="en-US"/>
           </a:p>
         </p:txBody>
       </p:sp>
@@ -1043,7 +1038,7 @@
           <a:p>
             <a:fld id="{C5CAF6BC-C327-4940-9830-49E66FCBC3F0}" type="datetime1">
               <a:rPr lang="en-US" smtClean="0"/>
-              <a:t>8/19/2024</a:t>
+              <a:t>12/27/2025</a:t>
             </a:fld>
             <a:endParaRPr lang="en-US"/>
           </a:p>
@@ -1065,10 +1060,9 @@
           <a:lstStyle/>
           <a:p>
             <a:r>
-              <a:rPr lang="en-US" smtClean="0"/>
+              <a:rPr lang="en-US"/>
               <a:t>Memory-Mapped SPM</a:t>
             </a:r>
-            <a:endParaRPr lang="en-US"/>
           </a:p>
         </p:txBody>
       </p:sp>
@@ -1142,10 +1136,9 @@
           <a:lstStyle/>
           <a:p>
             <a:r>
-              <a:rPr lang="en-US" smtClean="0"/>
+              <a:rPr lang="en-US"/>
               <a:t>Click to edit Master title style</a:t>
             </a:r>
-            <a:endParaRPr lang="en-US"/>
           </a:p>
         </p:txBody>
       </p:sp>
@@ -1171,38 +1164,37 @@
           <a:p>
             <a:pPr lvl="0"/>
             <a:r>
-              <a:rPr lang="en-US" smtClean="0"/>
+              <a:rPr lang="en-US"/>
               <a:t>Click to edit Master text styles</a:t>
             </a:r>
           </a:p>
           <a:p>
             <a:pPr lvl="1"/>
             <a:r>
-              <a:rPr lang="en-US" smtClean="0"/>
+              <a:rPr lang="en-US"/>
               <a:t>Second level</a:t>
             </a:r>
           </a:p>
           <a:p>
             <a:pPr lvl="2"/>
             <a:r>
-              <a:rPr lang="en-US" smtClean="0"/>
+              <a:rPr lang="en-US"/>
               <a:t>Third level</a:t>
             </a:r>
           </a:p>
           <a:p>
             <a:pPr lvl="3"/>
             <a:r>
-              <a:rPr lang="en-US" smtClean="0"/>
+              <a:rPr lang="en-US"/>
               <a:t>Fourth level</a:t>
             </a:r>
           </a:p>
           <a:p>
             <a:pPr lvl="4"/>
             <a:r>
-              <a:rPr lang="en-US" smtClean="0"/>
+              <a:rPr lang="en-US"/>
               <a:t>Fifth level</a:t>
             </a:r>
-            <a:endParaRPr lang="en-US"/>
           </a:p>
         </p:txBody>
       </p:sp>
@@ -1223,7 +1215,7 @@
           <a:p>
             <a:fld id="{CB595183-C90F-4867-BE66-12679E27E67F}" type="datetime1">
               <a:rPr lang="en-US" smtClean="0"/>
-              <a:t>8/19/2024</a:t>
+              <a:t>12/27/2025</a:t>
             </a:fld>
             <a:endParaRPr lang="en-US"/>
           </a:p>
@@ -1245,10 +1237,9 @@
           <a:lstStyle/>
           <a:p>
             <a:r>
-              <a:rPr lang="en-US" smtClean="0"/>
+              <a:rPr lang="en-US"/>
               <a:t>Memory-Mapped SPM</a:t>
             </a:r>
-            <a:endParaRPr lang="en-US"/>
           </a:p>
         </p:txBody>
       </p:sp>
@@ -1376,9 +1367,7 @@
         </p:style>
         <p:txBody>
           <a:bodyPr anchor="ctr"/>
-          <a:lstStyle>
-            <a:extLst/>
-          </a:lstStyle>
+          <a:lstStyle/>
           <a:p>
             <a:pPr algn="ctr" eaLnBrk="1" latinLnBrk="0" hangingPunct="1"/>
             <a:endParaRPr kumimoji="0" lang="en-US"/>
@@ -1448,9 +1437,7 @@
         </p:style>
         <p:txBody>
           <a:bodyPr anchor="ctr"/>
-          <a:lstStyle>
-            <a:extLst/>
-          </a:lstStyle>
+          <a:lstStyle/>
           <a:p>
             <a:pPr algn="ctr" eaLnBrk="1" latinLnBrk="0" hangingPunct="1"/>
             <a:endParaRPr kumimoji="0" lang="en-US"/>
@@ -1497,10 +1484,9 @@
           </a:lstStyle>
           <a:p>
             <a:r>
-              <a:rPr kumimoji="0" lang="en-US" smtClean="0"/>
+              <a:rPr kumimoji="0" lang="en-US"/>
               <a:t>Click to edit Master title style</a:t>
             </a:r>
-            <a:endParaRPr kumimoji="0" lang="en-US"/>
           </a:p>
         </p:txBody>
       </p:sp>
@@ -1564,10 +1550,9 @@
           </a:lstStyle>
           <a:p>
             <a:r>
-              <a:rPr kumimoji="0" lang="en-US" smtClean="0"/>
+              <a:rPr kumimoji="0" lang="en-US"/>
               <a:t>Click to edit Master subtitle style</a:t>
             </a:r>
-            <a:endParaRPr kumimoji="0" lang="en-US"/>
           </a:p>
         </p:txBody>
       </p:sp>
@@ -1584,13 +1569,11 @@
         <p:spPr/>
         <p:txBody>
           <a:bodyPr/>
-          <a:lstStyle>
-            <a:extLst/>
-          </a:lstStyle>
+          <a:lstStyle/>
           <a:p>
             <a:fld id="{F6A59B0B-27CB-4279-84EE-13F34D832C20}" type="datetime1">
               <a:rPr lang="en-US" smtClean="0"/>
-              <a:t>8/19/2024</a:t>
+              <a:t>12/27/2025</a:t>
             </a:fld>
             <a:endParaRPr lang="en-US" dirty="0"/>
           </a:p>
@@ -1609,12 +1592,10 @@
         <p:spPr/>
         <p:txBody>
           <a:bodyPr/>
-          <a:lstStyle>
-            <a:extLst/>
-          </a:lstStyle>
-          <a:p>
-            <a:r>
-              <a:rPr lang="en-US" smtClean="0"/>
+          <a:lstStyle/>
+          <a:p>
+            <a:r>
+              <a:rPr lang="en-US"/>
               <a:t>Memory-Mapped SPM</a:t>
             </a:r>
             <a:endParaRPr lang="en-US" dirty="0"/>
@@ -1634,9 +1615,7 @@
         <p:spPr/>
         <p:txBody>
           <a:bodyPr/>
-          <a:lstStyle>
-            <a:extLst/>
-          </a:lstStyle>
+          <a:lstStyle/>
           <a:p>
             <a:fld id="{B6F15528-21DE-4FAA-801E-634DDDAF4B2B}" type="slidenum">
               <a:rPr lang="en-US" smtClean="0"/>
@@ -1690,15 +1669,12 @@
         </p:spPr>
         <p:txBody>
           <a:bodyPr/>
-          <a:lstStyle>
-            <a:extLst/>
-          </a:lstStyle>
-          <a:p>
-            <a:r>
-              <a:rPr kumimoji="0" lang="en-US" smtClean="0"/>
+          <a:lstStyle/>
+          <a:p>
+            <a:r>
+              <a:rPr kumimoji="0" lang="en-US"/>
               <a:t>Click to edit Master title style</a:t>
             </a:r>
-            <a:endParaRPr kumimoji="0" lang="en-US"/>
           </a:p>
         </p:txBody>
       </p:sp>
@@ -1720,41 +1696,39 @@
         </p:spPr>
         <p:txBody>
           <a:bodyPr/>
-          <a:lstStyle>
-            <a:extLst/>
-          </a:lstStyle>
+          <a:lstStyle/>
           <a:p>
             <a:pPr lvl="0" eaLnBrk="1" latinLnBrk="0" hangingPunct="1"/>
             <a:r>
-              <a:rPr lang="en-US" smtClean="0"/>
+              <a:rPr lang="en-US"/>
               <a:t>Click to edit Master text styles</a:t>
             </a:r>
           </a:p>
           <a:p>
             <a:pPr lvl="1" eaLnBrk="1" latinLnBrk="0" hangingPunct="1"/>
             <a:r>
-              <a:rPr lang="en-US" smtClean="0"/>
+              <a:rPr lang="en-US"/>
               <a:t>Second level</a:t>
             </a:r>
           </a:p>
           <a:p>
             <a:pPr lvl="2" eaLnBrk="1" latinLnBrk="0" hangingPunct="1"/>
             <a:r>
-              <a:rPr lang="en-US" smtClean="0"/>
+              <a:rPr lang="en-US"/>
               <a:t>Third level</a:t>
             </a:r>
           </a:p>
           <a:p>
             <a:pPr lvl="3" eaLnBrk="1" latinLnBrk="0" hangingPunct="1"/>
             <a:r>
-              <a:rPr lang="en-US" smtClean="0"/>
+              <a:rPr lang="en-US"/>
               <a:t>Fourth level</a:t>
             </a:r>
           </a:p>
           <a:p>
             <a:pPr lvl="4" eaLnBrk="1" latinLnBrk="0" hangingPunct="1"/>
             <a:r>
-              <a:rPr lang="en-US" smtClean="0"/>
+              <a:rPr lang="en-US"/>
               <a:t>Fifth level</a:t>
             </a:r>
             <a:endParaRPr kumimoji="0" lang="en-US"/>
@@ -1774,13 +1748,11 @@
         <p:spPr/>
         <p:txBody>
           <a:bodyPr/>
-          <a:lstStyle>
-            <a:extLst/>
-          </a:lstStyle>
+          <a:lstStyle/>
           <a:p>
             <a:fld id="{187946A9-DE9C-4C0F-8CC5-C706728E934F}" type="datetime1">
               <a:rPr lang="en-US" smtClean="0"/>
-              <a:t>8/19/2024</a:t>
+              <a:t>12/27/2025</a:t>
             </a:fld>
             <a:endParaRPr lang="en-US"/>
           </a:p>
@@ -1799,12 +1771,10 @@
         <p:spPr/>
         <p:txBody>
           <a:bodyPr/>
-          <a:lstStyle>
-            <a:extLst/>
-          </a:lstStyle>
-          <a:p>
-            <a:r>
-              <a:rPr lang="en-US" smtClean="0"/>
+          <a:lstStyle/>
+          <a:p>
+            <a:r>
+              <a:rPr lang="en-US"/>
               <a:t>Memory-Mapped SPM</a:t>
             </a:r>
             <a:endParaRPr lang="en-US" dirty="0"/>
@@ -1824,9 +1794,7 @@
         <p:spPr/>
         <p:txBody>
           <a:bodyPr/>
-          <a:lstStyle>
-            <a:extLst/>
-          </a:lstStyle>
+          <a:lstStyle/>
           <a:p>
             <a:fld id="{B6F15528-21DE-4FAA-801E-634DDDAF4B2B}" type="slidenum">
               <a:rPr lang="en-US" smtClean="0"/>
@@ -1937,9 +1905,7 @@
         </p:style>
         <p:txBody>
           <a:bodyPr anchor="ctr"/>
-          <a:lstStyle>
-            <a:extLst/>
-          </a:lstStyle>
+          <a:lstStyle/>
           <a:p>
             <a:pPr algn="ctr" eaLnBrk="1" latinLnBrk="0" hangingPunct="1"/>
             <a:endParaRPr kumimoji="0" lang="en-US"/>
@@ -2009,9 +1975,7 @@
         </p:style>
         <p:txBody>
           <a:bodyPr anchor="ctr"/>
-          <a:lstStyle>
-            <a:extLst/>
-          </a:lstStyle>
+          <a:lstStyle/>
           <a:p>
             <a:pPr algn="ctr" eaLnBrk="1" latinLnBrk="0" hangingPunct="1"/>
             <a:endParaRPr kumimoji="0" lang="en-US"/>
@@ -2052,10 +2016,9 @@
           </a:lstStyle>
           <a:p>
             <a:r>
-              <a:rPr kumimoji="0" lang="en-US" smtClean="0"/>
+              <a:rPr kumimoji="0" lang="en-US"/>
               <a:t>Click to edit Master title style</a:t>
             </a:r>
-            <a:endParaRPr kumimoji="0" lang="en-US"/>
           </a:p>
         </p:txBody>
       </p:sp>
@@ -2141,7 +2104,7 @@
           <a:p>
             <a:pPr lvl="0" eaLnBrk="1" latinLnBrk="0" hangingPunct="1"/>
             <a:r>
-              <a:rPr kumimoji="0" lang="en-US" smtClean="0"/>
+              <a:rPr kumimoji="0" lang="en-US"/>
               <a:t>Click to edit Master text styles</a:t>
             </a:r>
           </a:p>
@@ -2160,13 +2123,11 @@
         <p:spPr/>
         <p:txBody>
           <a:bodyPr/>
-          <a:lstStyle>
-            <a:extLst/>
-          </a:lstStyle>
+          <a:lstStyle/>
           <a:p>
             <a:fld id="{98237A1E-E215-416E-8D25-5F336D5B557C}" type="datetime1">
               <a:rPr lang="en-US" smtClean="0"/>
-              <a:t>8/19/2024</a:t>
+              <a:t>12/27/2025</a:t>
             </a:fld>
             <a:endParaRPr lang="en-US"/>
           </a:p>
@@ -2185,15 +2146,12 @@
         <p:spPr/>
         <p:txBody>
           <a:bodyPr/>
-          <a:lstStyle>
-            <a:extLst/>
-          </a:lstStyle>
-          <a:p>
-            <a:r>
-              <a:rPr lang="en-US" smtClean="0"/>
+          <a:lstStyle/>
+          <a:p>
+            <a:r>
+              <a:rPr lang="en-US"/>
               <a:t>Memory-Mapped SPM</a:t>
             </a:r>
-            <a:endParaRPr lang="en-US"/>
           </a:p>
         </p:txBody>
       </p:sp>
@@ -2210,9 +2168,7 @@
         <p:spPr/>
         <p:txBody>
           <a:bodyPr/>
-          <a:lstStyle>
-            <a:extLst/>
-          </a:lstStyle>
+          <a:lstStyle/>
           <a:p>
             <a:fld id="{B6F15528-21DE-4FAA-801E-634DDDAF4B2B}" type="slidenum">
               <a:rPr lang="en-US" smtClean="0"/>
@@ -2261,15 +2217,12 @@
         <p:spPr/>
         <p:txBody>
           <a:bodyPr/>
-          <a:lstStyle>
-            <a:extLst/>
-          </a:lstStyle>
-          <a:p>
-            <a:r>
-              <a:rPr kumimoji="0" lang="en-US" smtClean="0"/>
+          <a:lstStyle/>
+          <a:p>
+            <a:r>
+              <a:rPr kumimoji="0" lang="en-US"/>
               <a:t>Click to edit Master title style</a:t>
             </a:r>
-            <a:endParaRPr kumimoji="0" lang="en-US"/>
           </a:p>
         </p:txBody>
       </p:sp>
@@ -2312,35 +2265,35 @@
           <a:p>
             <a:pPr lvl="0" eaLnBrk="1" latinLnBrk="0" hangingPunct="1"/>
             <a:r>
-              <a:rPr lang="en-US" smtClean="0"/>
+              <a:rPr lang="en-US"/>
               <a:t>Click to edit Master text styles</a:t>
             </a:r>
           </a:p>
           <a:p>
             <a:pPr lvl="1" eaLnBrk="1" latinLnBrk="0" hangingPunct="1"/>
             <a:r>
-              <a:rPr lang="en-US" smtClean="0"/>
+              <a:rPr lang="en-US"/>
               <a:t>Second level</a:t>
             </a:r>
           </a:p>
           <a:p>
             <a:pPr lvl="2" eaLnBrk="1" latinLnBrk="0" hangingPunct="1"/>
             <a:r>
-              <a:rPr lang="en-US" smtClean="0"/>
+              <a:rPr lang="en-US"/>
               <a:t>Third level</a:t>
             </a:r>
           </a:p>
           <a:p>
             <a:pPr lvl="3" eaLnBrk="1" latinLnBrk="0" hangingPunct="1"/>
             <a:r>
-              <a:rPr lang="en-US" smtClean="0"/>
+              <a:rPr lang="en-US"/>
               <a:t>Fourth level</a:t>
             </a:r>
           </a:p>
           <a:p>
             <a:pPr lvl="4" eaLnBrk="1" latinLnBrk="0" hangingPunct="1"/>
             <a:r>
-              <a:rPr lang="en-US" smtClean="0"/>
+              <a:rPr lang="en-US"/>
               <a:t>Fifth level</a:t>
             </a:r>
             <a:endParaRPr kumimoji="0" lang="en-US"/>
@@ -2386,35 +2339,35 @@
           <a:p>
             <a:pPr lvl="0" eaLnBrk="1" latinLnBrk="0" hangingPunct="1"/>
             <a:r>
-              <a:rPr lang="en-US" smtClean="0"/>
+              <a:rPr lang="en-US"/>
               <a:t>Click to edit Master text styles</a:t>
             </a:r>
           </a:p>
           <a:p>
             <a:pPr lvl="1" eaLnBrk="1" latinLnBrk="0" hangingPunct="1"/>
             <a:r>
-              <a:rPr lang="en-US" smtClean="0"/>
+              <a:rPr lang="en-US"/>
               <a:t>Second level</a:t>
             </a:r>
           </a:p>
           <a:p>
             <a:pPr lvl="2" eaLnBrk="1" latinLnBrk="0" hangingPunct="1"/>
             <a:r>
-              <a:rPr lang="en-US" smtClean="0"/>
+              <a:rPr lang="en-US"/>
               <a:t>Third level</a:t>
             </a:r>
           </a:p>
           <a:p>
             <a:pPr lvl="3" eaLnBrk="1" latinLnBrk="0" hangingPunct="1"/>
             <a:r>
-              <a:rPr lang="en-US" smtClean="0"/>
+              <a:rPr lang="en-US"/>
               <a:t>Fourth level</a:t>
             </a:r>
           </a:p>
           <a:p>
             <a:pPr lvl="4" eaLnBrk="1" latinLnBrk="0" hangingPunct="1"/>
             <a:r>
-              <a:rPr lang="en-US" smtClean="0"/>
+              <a:rPr lang="en-US"/>
               <a:t>Fifth level</a:t>
             </a:r>
             <a:endParaRPr kumimoji="0" lang="en-US"/>
@@ -2434,13 +2387,11 @@
         <p:spPr/>
         <p:txBody>
           <a:bodyPr/>
-          <a:lstStyle>
-            <a:extLst/>
-          </a:lstStyle>
+          <a:lstStyle/>
           <a:p>
             <a:fld id="{B3FD8B5B-8A46-412C-A2D2-8F2B1B2EC62B}" type="datetime1">
               <a:rPr lang="en-US" smtClean="0"/>
-              <a:t>8/19/2024</a:t>
+              <a:t>12/27/2025</a:t>
             </a:fld>
             <a:endParaRPr lang="en-US"/>
           </a:p>
@@ -2459,15 +2410,12 @@
         <p:spPr/>
         <p:txBody>
           <a:bodyPr/>
-          <a:lstStyle>
-            <a:extLst/>
-          </a:lstStyle>
-          <a:p>
-            <a:r>
-              <a:rPr lang="en-US" smtClean="0"/>
+          <a:lstStyle/>
+          <a:p>
+            <a:r>
+              <a:rPr lang="en-US"/>
               <a:t>Memory-Mapped SPM</a:t>
             </a:r>
-            <a:endParaRPr lang="en-US"/>
           </a:p>
         </p:txBody>
       </p:sp>
@@ -2484,9 +2432,7 @@
         <p:spPr/>
         <p:txBody>
           <a:bodyPr/>
-          <a:lstStyle>
-            <a:extLst/>
-          </a:lstStyle>
+          <a:lstStyle/>
           <a:p>
             <a:fld id="{B6F15528-21DE-4FAA-801E-634DDDAF4B2B}" type="slidenum">
               <a:rPr lang="en-US" smtClean="0"/>
@@ -2548,10 +2494,9 @@
           </a:lstStyle>
           <a:p>
             <a:r>
-              <a:rPr kumimoji="0" lang="en-US" smtClean="0"/>
+              <a:rPr kumimoji="0" lang="en-US"/>
               <a:t>Click to edit Master title style</a:t>
             </a:r>
-            <a:endParaRPr kumimoji="0" lang="en-US"/>
           </a:p>
         </p:txBody>
       </p:sp>
@@ -2603,7 +2548,7 @@
           <a:p>
             <a:pPr lvl="0" eaLnBrk="1" latinLnBrk="0" hangingPunct="1"/>
             <a:r>
-              <a:rPr kumimoji="0" lang="en-US" smtClean="0"/>
+              <a:rPr kumimoji="0" lang="en-US"/>
               <a:t>Click to edit Master text styles</a:t>
             </a:r>
           </a:p>
@@ -2657,7 +2602,7 @@
           <a:p>
             <a:pPr lvl="0" eaLnBrk="1" latinLnBrk="0" hangingPunct="1"/>
             <a:r>
-              <a:rPr kumimoji="0" lang="en-US" smtClean="0"/>
+              <a:rPr kumimoji="0" lang="en-US"/>
               <a:t>Click to edit Master text styles</a:t>
             </a:r>
           </a:p>
@@ -2702,35 +2647,35 @@
           <a:p>
             <a:pPr lvl="0" eaLnBrk="1" latinLnBrk="0" hangingPunct="1"/>
             <a:r>
-              <a:rPr lang="en-US" smtClean="0"/>
+              <a:rPr lang="en-US"/>
               <a:t>Click to edit Master text styles</a:t>
             </a:r>
           </a:p>
           <a:p>
             <a:pPr lvl="1" eaLnBrk="1" latinLnBrk="0" hangingPunct="1"/>
             <a:r>
-              <a:rPr lang="en-US" smtClean="0"/>
+              <a:rPr lang="en-US"/>
               <a:t>Second level</a:t>
             </a:r>
           </a:p>
           <a:p>
             <a:pPr lvl="2" eaLnBrk="1" latinLnBrk="0" hangingPunct="1"/>
             <a:r>
-              <a:rPr lang="en-US" smtClean="0"/>
+              <a:rPr lang="en-US"/>
               <a:t>Third level</a:t>
             </a:r>
           </a:p>
           <a:p>
             <a:pPr lvl="3" eaLnBrk="1" latinLnBrk="0" hangingPunct="1"/>
             <a:r>
-              <a:rPr lang="en-US" smtClean="0"/>
+              <a:rPr lang="en-US"/>
               <a:t>Fourth level</a:t>
             </a:r>
           </a:p>
           <a:p>
             <a:pPr lvl="4" eaLnBrk="1" latinLnBrk="0" hangingPunct="1"/>
             <a:r>
-              <a:rPr lang="en-US" smtClean="0"/>
+              <a:rPr lang="en-US"/>
               <a:t>Fifth level</a:t>
             </a:r>
             <a:endParaRPr kumimoji="0" lang="en-US"/>
@@ -2776,35 +2721,35 @@
           <a:p>
             <a:pPr lvl="0" eaLnBrk="1" latinLnBrk="0" hangingPunct="1"/>
             <a:r>
-              <a:rPr lang="en-US" smtClean="0"/>
+              <a:rPr lang="en-US"/>
               <a:t>Click to edit Master text styles</a:t>
             </a:r>
           </a:p>
           <a:p>
             <a:pPr lvl="1" eaLnBrk="1" latinLnBrk="0" hangingPunct="1"/>
             <a:r>
-              <a:rPr lang="en-US" smtClean="0"/>
+              <a:rPr lang="en-US"/>
               <a:t>Second level</a:t>
             </a:r>
           </a:p>
           <a:p>
             <a:pPr lvl="2" eaLnBrk="1" latinLnBrk="0" hangingPunct="1"/>
             <a:r>
-              <a:rPr lang="en-US" smtClean="0"/>
+              <a:rPr lang="en-US"/>
               <a:t>Third level</a:t>
             </a:r>
           </a:p>
           <a:p>
             <a:pPr lvl="3" eaLnBrk="1" latinLnBrk="0" hangingPunct="1"/>
             <a:r>
-              <a:rPr lang="en-US" smtClean="0"/>
+              <a:rPr lang="en-US"/>
               <a:t>Fourth level</a:t>
             </a:r>
           </a:p>
           <a:p>
             <a:pPr lvl="4" eaLnBrk="1" latinLnBrk="0" hangingPunct="1"/>
             <a:r>
-              <a:rPr lang="en-US" smtClean="0"/>
+              <a:rPr lang="en-US"/>
               <a:t>Fifth level</a:t>
             </a:r>
             <a:endParaRPr kumimoji="0" lang="en-US"/>
@@ -2824,13 +2769,11 @@
         <p:spPr/>
         <p:txBody>
           <a:bodyPr/>
-          <a:lstStyle>
-            <a:extLst/>
-          </a:lstStyle>
+          <a:lstStyle/>
           <a:p>
             <a:fld id="{3D72D1A0-E9CE-4C54-8D41-8DBB9F509117}" type="datetime1">
               <a:rPr lang="en-US" smtClean="0"/>
-              <a:t>8/19/2024</a:t>
+              <a:t>12/27/2025</a:t>
             </a:fld>
             <a:endParaRPr lang="en-US"/>
           </a:p>
@@ -2849,15 +2792,12 @@
         <p:spPr/>
         <p:txBody>
           <a:bodyPr/>
-          <a:lstStyle>
-            <a:extLst/>
-          </a:lstStyle>
-          <a:p>
-            <a:r>
-              <a:rPr lang="en-US" smtClean="0"/>
+          <a:lstStyle/>
+          <a:p>
+            <a:r>
+              <a:rPr lang="en-US"/>
               <a:t>Memory-Mapped SPM</a:t>
             </a:r>
-            <a:endParaRPr lang="en-US"/>
           </a:p>
         </p:txBody>
       </p:sp>
@@ -2874,9 +2814,7 @@
         <p:spPr/>
         <p:txBody>
           <a:bodyPr/>
-          <a:lstStyle>
-            <a:extLst/>
-          </a:lstStyle>
+          <a:lstStyle/>
           <a:p>
             <a:fld id="{B6F15528-21DE-4FAA-801E-634DDDAF4B2B}" type="slidenum">
               <a:rPr lang="en-US" smtClean="0"/>
@@ -2925,15 +2863,12 @@
         <p:spPr/>
         <p:txBody>
           <a:bodyPr/>
-          <a:lstStyle>
-            <a:extLst/>
-          </a:lstStyle>
-          <a:p>
-            <a:r>
-              <a:rPr kumimoji="0" lang="en-US" smtClean="0"/>
+          <a:lstStyle/>
+          <a:p>
+            <a:r>
+              <a:rPr kumimoji="0" lang="en-US"/>
               <a:t>Click to edit Master title style</a:t>
             </a:r>
-            <a:endParaRPr kumimoji="0" lang="en-US"/>
           </a:p>
         </p:txBody>
       </p:sp>
@@ -2950,13 +2885,11 @@
         <p:spPr/>
         <p:txBody>
           <a:bodyPr/>
-          <a:lstStyle>
-            <a:extLst/>
-          </a:lstStyle>
+          <a:lstStyle/>
           <a:p>
             <a:fld id="{5384E1B4-9FAF-4C2A-A5AC-8C7F175CBD59}" type="datetime1">
               <a:rPr lang="en-US" smtClean="0"/>
-              <a:t>8/19/2024</a:t>
+              <a:t>12/27/2025</a:t>
             </a:fld>
             <a:endParaRPr lang="en-US"/>
           </a:p>
@@ -2975,15 +2908,12 @@
         <p:spPr/>
         <p:txBody>
           <a:bodyPr/>
-          <a:lstStyle>
-            <a:extLst/>
-          </a:lstStyle>
-          <a:p>
-            <a:r>
-              <a:rPr lang="en-US" smtClean="0"/>
+          <a:lstStyle/>
+          <a:p>
+            <a:r>
+              <a:rPr lang="en-US"/>
               <a:t>Memory-Mapped SPM</a:t>
             </a:r>
-            <a:endParaRPr lang="en-US"/>
           </a:p>
         </p:txBody>
       </p:sp>
@@ -3000,9 +2930,7 @@
         <p:spPr/>
         <p:txBody>
           <a:bodyPr/>
-          <a:lstStyle>
-            <a:extLst/>
-          </a:lstStyle>
+          <a:lstStyle/>
           <a:p>
             <a:fld id="{B6F15528-21DE-4FAA-801E-634DDDAF4B2B}" type="slidenum">
               <a:rPr lang="en-US" smtClean="0"/>
@@ -3113,9 +3041,7 @@
         </p:style>
         <p:txBody>
           <a:bodyPr anchor="ctr"/>
-          <a:lstStyle>
-            <a:extLst/>
-          </a:lstStyle>
+          <a:lstStyle/>
           <a:p>
             <a:pPr algn="ctr" eaLnBrk="1" latinLnBrk="0" hangingPunct="1"/>
             <a:endParaRPr kumimoji="0" lang="en-US"/>
@@ -3135,13 +3061,11 @@
         <p:spPr/>
         <p:txBody>
           <a:bodyPr/>
-          <a:lstStyle>
-            <a:extLst/>
-          </a:lstStyle>
+          <a:lstStyle/>
           <a:p>
             <a:fld id="{E2306DEF-8BC5-4D1A-A84F-BC32AA802BDD}" type="datetime1">
               <a:rPr lang="en-US" smtClean="0"/>
-              <a:t>8/19/2024</a:t>
+              <a:t>12/27/2025</a:t>
             </a:fld>
             <a:endParaRPr lang="en-US"/>
           </a:p>
@@ -3160,15 +3084,12 @@
         <p:spPr/>
         <p:txBody>
           <a:bodyPr/>
-          <a:lstStyle>
-            <a:extLst/>
-          </a:lstStyle>
-          <a:p>
-            <a:r>
-              <a:rPr lang="en-US" smtClean="0"/>
+          <a:lstStyle/>
+          <a:p>
+            <a:r>
+              <a:rPr lang="en-US"/>
               <a:t>Memory-Mapped SPM</a:t>
             </a:r>
-            <a:endParaRPr lang="en-US"/>
           </a:p>
         </p:txBody>
       </p:sp>
@@ -3185,9 +3106,7 @@
         <p:spPr/>
         <p:txBody>
           <a:bodyPr/>
-          <a:lstStyle>
-            <a:extLst/>
-          </a:lstStyle>
+          <a:lstStyle/>
           <a:p>
             <a:fld id="{B6F15528-21DE-4FAA-801E-634DDDAF4B2B}" type="slidenum">
               <a:rPr lang="en-US" smtClean="0"/>
@@ -3254,10 +3173,9 @@
           </a:lstStyle>
           <a:p>
             <a:r>
-              <a:rPr kumimoji="0" lang="en-US" smtClean="0"/>
+              <a:rPr kumimoji="0" lang="en-US"/>
               <a:t>Click to edit Master title style</a:t>
             </a:r>
-            <a:endParaRPr kumimoji="0" lang="en-US"/>
           </a:p>
         </p:txBody>
       </p:sp>
@@ -3328,35 +3246,35 @@
           <a:p>
             <a:pPr lvl="0" eaLnBrk="1" latinLnBrk="0" hangingPunct="1"/>
             <a:r>
-              <a:rPr lang="en-US" smtClean="0"/>
+              <a:rPr lang="en-US"/>
               <a:t>Click to edit Master text styles</a:t>
             </a:r>
           </a:p>
           <a:p>
             <a:pPr lvl="1" eaLnBrk="1" latinLnBrk="0" hangingPunct="1"/>
             <a:r>
-              <a:rPr lang="en-US" smtClean="0"/>
+              <a:rPr lang="en-US"/>
               <a:t>Second level</a:t>
             </a:r>
           </a:p>
           <a:p>
             <a:pPr lvl="2" eaLnBrk="1" latinLnBrk="0" hangingPunct="1"/>
             <a:r>
-              <a:rPr lang="en-US" smtClean="0"/>
+              <a:rPr lang="en-US"/>
               <a:t>Third level</a:t>
             </a:r>
           </a:p>
           <a:p>
             <a:pPr lvl="3" eaLnBrk="1" latinLnBrk="0" hangingPunct="1"/>
             <a:r>
-              <a:rPr lang="en-US" smtClean="0"/>
+              <a:rPr lang="en-US"/>
               <a:t>Fourth level</a:t>
             </a:r>
           </a:p>
           <a:p>
             <a:pPr lvl="4" eaLnBrk="1" latinLnBrk="0" hangingPunct="1"/>
             <a:r>
-              <a:rPr lang="en-US" smtClean="0"/>
+              <a:rPr lang="en-US"/>
               <a:t>Fifth level</a:t>
             </a:r>
             <a:endParaRPr kumimoji="0" lang="en-US"/>
@@ -3426,35 +3344,35 @@
           <a:p>
             <a:pPr lvl="0" eaLnBrk="1" latinLnBrk="0" hangingPunct="1"/>
             <a:r>
-              <a:rPr lang="en-US" smtClean="0"/>
+              <a:rPr lang="en-US"/>
               <a:t>Click to edit Master text styles</a:t>
             </a:r>
           </a:p>
           <a:p>
             <a:pPr lvl="1" eaLnBrk="1" latinLnBrk="0" hangingPunct="1"/>
             <a:r>
-              <a:rPr lang="en-US" smtClean="0"/>
+              <a:rPr lang="en-US"/>
               <a:t>Second level</a:t>
             </a:r>
           </a:p>
           <a:p>
             <a:pPr lvl="2" eaLnBrk="1" latinLnBrk="0" hangingPunct="1"/>
             <a:r>
-              <a:rPr lang="en-US" smtClean="0"/>
+              <a:rPr lang="en-US"/>
               <a:t>Third level</a:t>
             </a:r>
           </a:p>
           <a:p>
             <a:pPr lvl="3" eaLnBrk="1" latinLnBrk="0" hangingPunct="1"/>
             <a:r>
-              <a:rPr lang="en-US" smtClean="0"/>
+              <a:rPr lang="en-US"/>
               <a:t>Fourth level</a:t>
             </a:r>
           </a:p>
           <a:p>
             <a:pPr lvl="4" eaLnBrk="1" latinLnBrk="0" hangingPunct="1"/>
             <a:r>
-              <a:rPr lang="en-US" smtClean="0"/>
+              <a:rPr lang="en-US"/>
               <a:t>Fifth level</a:t>
             </a:r>
             <a:endParaRPr kumimoji="0" lang="en-US"/>
@@ -3474,13 +3392,11 @@
         <p:spPr/>
         <p:txBody>
           <a:bodyPr/>
-          <a:lstStyle>
-            <a:extLst/>
-          </a:lstStyle>
+          <a:lstStyle/>
           <a:p>
             <a:fld id="{628B8A3B-8A96-493A-9055-E95E174A1B57}" type="datetime1">
               <a:rPr lang="en-US" smtClean="0"/>
-              <a:t>8/19/2024</a:t>
+              <a:t>12/27/2025</a:t>
             </a:fld>
             <a:endParaRPr lang="en-US"/>
           </a:p>
@@ -3499,15 +3415,12 @@
         <p:spPr/>
         <p:txBody>
           <a:bodyPr/>
-          <a:lstStyle>
-            <a:extLst/>
-          </a:lstStyle>
-          <a:p>
-            <a:r>
-              <a:rPr lang="en-US" smtClean="0"/>
+          <a:lstStyle/>
+          <a:p>
+            <a:r>
+              <a:rPr lang="en-US"/>
               <a:t>Memory-Mapped SPM</a:t>
             </a:r>
-            <a:endParaRPr lang="en-US"/>
           </a:p>
         </p:txBody>
       </p:sp>
@@ -3524,9 +3437,7 @@
         <p:spPr/>
         <p:txBody>
           <a:bodyPr/>
-          <a:lstStyle>
-            <a:extLst/>
-          </a:lstStyle>
+          <a:lstStyle/>
           <a:p>
             <a:fld id="{B6F15528-21DE-4FAA-801E-634DDDAF4B2B}" type="slidenum">
               <a:rPr lang="en-US" smtClean="0"/>
@@ -3592,10 +3503,9 @@
           </a:lstStyle>
           <a:p>
             <a:r>
-              <a:rPr lang="en-US" smtClean="0"/>
+              <a:rPr lang="en-US"/>
               <a:t>Click to edit Master title style</a:t>
             </a:r>
-            <a:endParaRPr lang="en-US"/>
           </a:p>
         </p:txBody>
       </p:sp>
@@ -3652,38 +3562,37 @@
           <a:p>
             <a:pPr lvl="0"/>
             <a:r>
-              <a:rPr lang="en-US" smtClean="0"/>
+              <a:rPr lang="en-US"/>
               <a:t>Click to edit Master text styles</a:t>
             </a:r>
           </a:p>
           <a:p>
             <a:pPr lvl="1"/>
             <a:r>
-              <a:rPr lang="en-US" smtClean="0"/>
+              <a:rPr lang="en-US"/>
               <a:t>Second level</a:t>
             </a:r>
           </a:p>
           <a:p>
             <a:pPr lvl="2"/>
             <a:r>
-              <a:rPr lang="en-US" smtClean="0"/>
+              <a:rPr lang="en-US"/>
               <a:t>Third level</a:t>
             </a:r>
           </a:p>
           <a:p>
             <a:pPr lvl="3"/>
             <a:r>
-              <a:rPr lang="en-US" smtClean="0"/>
+              <a:rPr lang="en-US"/>
               <a:t>Fourth level</a:t>
             </a:r>
           </a:p>
           <a:p>
             <a:pPr lvl="4"/>
             <a:r>
-              <a:rPr lang="en-US" smtClean="0"/>
+              <a:rPr lang="en-US"/>
               <a:t>Fifth level</a:t>
             </a:r>
-            <a:endParaRPr lang="en-US"/>
           </a:p>
         </p:txBody>
       </p:sp>
@@ -3719,7 +3628,7 @@
           <a:p>
             <a:pPr rtl="1"/>
             <a:r>
-              <a:rPr lang="en-US" dirty="0" smtClean="0">
+              <a:rPr lang="en-US" dirty="0">
                 <a:cs typeface="B Titr" panose="00000700000000000000" pitchFamily="2" charset="-78"/>
               </a:rPr>
               <a:t>Microprocessors and Assembly Language, Fall 2024, AUT, Tehran, Iran </a:t>
@@ -3777,13 +3686,6 @@
   <p:clrMapOvr>
     <a:masterClrMapping/>
   </p:clrMapOvr>
-  <p:timing>
-    <p:tnLst>
-      <p:par>
-        <p:cTn id="1" dur="indefinite" restart="never" nodeType="tmRoot"/>
-      </p:par>
-    </p:tnLst>
-  </p:timing>
 </p:sldLayout>
 </file>
 
@@ -3879,9 +3781,7 @@
         </p:style>
         <p:txBody>
           <a:bodyPr anchor="ctr"/>
-          <a:lstStyle>
-            <a:extLst/>
-          </a:lstStyle>
+          <a:lstStyle/>
           <a:p>
             <a:pPr algn="ctr" eaLnBrk="1" latinLnBrk="0" hangingPunct="1"/>
             <a:endParaRPr kumimoji="0" lang="en-US"/>
@@ -3929,9 +3829,7 @@
         </p:style>
         <p:txBody>
           <a:bodyPr anchor="ctr"/>
-          <a:lstStyle>
-            <a:extLst/>
-          </a:lstStyle>
+          <a:lstStyle/>
           <a:p>
             <a:pPr algn="ctr" eaLnBrk="1" latinLnBrk="0" hangingPunct="1"/>
             <a:endParaRPr kumimoji="0" lang="en-US"/>
@@ -3972,10 +3870,9 @@
           </a:lstStyle>
           <a:p>
             <a:r>
-              <a:rPr kumimoji="0" lang="en-US" smtClean="0"/>
+              <a:rPr kumimoji="0" lang="en-US"/>
               <a:t>Click to edit Master title style</a:t>
             </a:r>
-            <a:endParaRPr kumimoji="0" lang="en-US"/>
           </a:p>
         </p:txBody>
       </p:sp>
@@ -4042,35 +3939,35 @@
           <a:p>
             <a:pPr lvl="0" eaLnBrk="1" latinLnBrk="0" hangingPunct="1"/>
             <a:r>
-              <a:rPr lang="en-US" smtClean="0"/>
+              <a:rPr lang="en-US"/>
               <a:t>Click to edit Master text styles</a:t>
             </a:r>
           </a:p>
           <a:p>
             <a:pPr lvl="1" eaLnBrk="1" latinLnBrk="0" hangingPunct="1"/>
             <a:r>
-              <a:rPr lang="en-US" smtClean="0"/>
+              <a:rPr lang="en-US"/>
               <a:t>Second level</a:t>
             </a:r>
           </a:p>
           <a:p>
             <a:pPr lvl="2" eaLnBrk="1" latinLnBrk="0" hangingPunct="1"/>
             <a:r>
-              <a:rPr lang="en-US" smtClean="0"/>
+              <a:rPr lang="en-US"/>
               <a:t>Third level</a:t>
             </a:r>
           </a:p>
           <a:p>
             <a:pPr lvl="3" eaLnBrk="1" latinLnBrk="0" hangingPunct="1"/>
             <a:r>
-              <a:rPr lang="en-US" smtClean="0"/>
+              <a:rPr lang="en-US"/>
               <a:t>Fourth level</a:t>
             </a:r>
           </a:p>
           <a:p>
             <a:pPr lvl="4" eaLnBrk="1" latinLnBrk="0" hangingPunct="1"/>
             <a:r>
-              <a:rPr lang="en-US" smtClean="0"/>
+              <a:rPr lang="en-US"/>
               <a:t>Fifth level</a:t>
             </a:r>
             <a:endParaRPr kumimoji="0" lang="en-US"/>
@@ -4090,13 +3987,11 @@
         <p:spPr/>
         <p:txBody>
           <a:bodyPr/>
-          <a:lstStyle>
-            <a:extLst/>
-          </a:lstStyle>
+          <a:lstStyle/>
           <a:p>
             <a:fld id="{793F6010-06C4-4772-A873-F0169484628B}" type="datetime1">
               <a:rPr lang="en-US" smtClean="0"/>
-              <a:t>8/19/2024</a:t>
+              <a:t>12/27/2025</a:t>
             </a:fld>
             <a:endParaRPr lang="en-US"/>
           </a:p>
@@ -4115,15 +4010,12 @@
         <p:spPr/>
         <p:txBody>
           <a:bodyPr/>
-          <a:lstStyle>
-            <a:extLst/>
-          </a:lstStyle>
-          <a:p>
-            <a:r>
-              <a:rPr lang="en-US" smtClean="0"/>
+          <a:lstStyle/>
+          <a:p>
+            <a:r>
+              <a:rPr lang="en-US"/>
               <a:t>Memory-Mapped SPM</a:t>
             </a:r>
-            <a:endParaRPr lang="en-US"/>
           </a:p>
         </p:txBody>
       </p:sp>
@@ -4140,9 +4032,7 @@
         <p:spPr/>
         <p:txBody>
           <a:bodyPr/>
-          <a:lstStyle>
-            <a:extLst/>
-          </a:lstStyle>
+          <a:lstStyle/>
           <a:p>
             <a:fld id="{B6F15528-21DE-4FAA-801E-634DDDAF4B2B}" type="slidenum">
               <a:rPr lang="en-US" smtClean="0"/>
@@ -4191,10 +4081,9 @@
           </a:lstStyle>
           <a:p>
             <a:r>
-              <a:rPr kumimoji="0" lang="en-US" smtClean="0"/>
+              <a:rPr kumimoji="0" lang="en-US"/>
               <a:t>Click icon to add picture</a:t>
             </a:r>
-            <a:endParaRPr kumimoji="0" lang="en-US"/>
           </a:p>
         </p:txBody>
       </p:sp>
@@ -4241,15 +4130,12 @@
         </p:spPr>
         <p:txBody>
           <a:bodyPr/>
-          <a:lstStyle>
-            <a:extLst/>
-          </a:lstStyle>
-          <a:p>
-            <a:r>
-              <a:rPr kumimoji="0" lang="en-US" smtClean="0"/>
+          <a:lstStyle/>
+          <a:p>
+            <a:r>
+              <a:rPr kumimoji="0" lang="en-US"/>
               <a:t>Click to edit Master title style</a:t>
             </a:r>
-            <a:endParaRPr kumimoji="0" lang="en-US"/>
           </a:p>
         </p:txBody>
       </p:sp>
@@ -4271,41 +4157,39 @@
         </p:spPr>
         <p:txBody>
           <a:bodyPr vert="eaVert"/>
-          <a:lstStyle>
-            <a:extLst/>
-          </a:lstStyle>
+          <a:lstStyle/>
           <a:p>
             <a:pPr lvl="0" eaLnBrk="1" latinLnBrk="0" hangingPunct="1"/>
             <a:r>
-              <a:rPr lang="en-US" smtClean="0"/>
+              <a:rPr lang="en-US"/>
               <a:t>Click to edit Master text styles</a:t>
             </a:r>
           </a:p>
           <a:p>
             <a:pPr lvl="1" eaLnBrk="1" latinLnBrk="0" hangingPunct="1"/>
             <a:r>
-              <a:rPr lang="en-US" smtClean="0"/>
+              <a:rPr lang="en-US"/>
               <a:t>Second level</a:t>
             </a:r>
           </a:p>
           <a:p>
             <a:pPr lvl="2" eaLnBrk="1" latinLnBrk="0" hangingPunct="1"/>
             <a:r>
-              <a:rPr lang="en-US" smtClean="0"/>
+              <a:rPr lang="en-US"/>
               <a:t>Third level</a:t>
             </a:r>
           </a:p>
           <a:p>
             <a:pPr lvl="3" eaLnBrk="1" latinLnBrk="0" hangingPunct="1"/>
             <a:r>
-              <a:rPr lang="en-US" smtClean="0"/>
+              <a:rPr lang="en-US"/>
               <a:t>Fourth level</a:t>
             </a:r>
           </a:p>
           <a:p>
             <a:pPr lvl="4" eaLnBrk="1" latinLnBrk="0" hangingPunct="1"/>
             <a:r>
-              <a:rPr lang="en-US" smtClean="0"/>
+              <a:rPr lang="en-US"/>
               <a:t>Fifth level</a:t>
             </a:r>
             <a:endParaRPr kumimoji="0" lang="en-US"/>
@@ -4325,13 +4209,11 @@
         <p:spPr/>
         <p:txBody>
           <a:bodyPr/>
-          <a:lstStyle>
-            <a:extLst/>
-          </a:lstStyle>
+          <a:lstStyle/>
           <a:p>
             <a:fld id="{9D38C875-1C6F-4BBA-A49D-A655DE5157F6}" type="datetime1">
               <a:rPr lang="en-US" smtClean="0"/>
-              <a:t>8/19/2024</a:t>
+              <a:t>12/27/2025</a:t>
             </a:fld>
             <a:endParaRPr lang="en-US"/>
           </a:p>
@@ -4350,15 +4232,12 @@
         <p:spPr/>
         <p:txBody>
           <a:bodyPr/>
-          <a:lstStyle>
-            <a:extLst/>
-          </a:lstStyle>
-          <a:p>
-            <a:r>
-              <a:rPr lang="en-US" smtClean="0"/>
+          <a:lstStyle/>
+          <a:p>
+            <a:r>
+              <a:rPr lang="en-US"/>
               <a:t>Memory-Mapped SPM</a:t>
             </a:r>
-            <a:endParaRPr lang="en-US"/>
           </a:p>
         </p:txBody>
       </p:sp>
@@ -4375,9 +4254,7 @@
         <p:spPr/>
         <p:txBody>
           <a:bodyPr/>
-          <a:lstStyle>
-            <a:extLst/>
-          </a:lstStyle>
+          <a:lstStyle/>
           <a:p>
             <a:fld id="{B6F15528-21DE-4FAA-801E-634DDDAF4B2B}" type="slidenum">
               <a:rPr lang="en-US" smtClean="0"/>
@@ -4431,15 +4308,12 @@
         </p:spPr>
         <p:txBody>
           <a:bodyPr vert="eaVert"/>
-          <a:lstStyle>
-            <a:extLst/>
-          </a:lstStyle>
-          <a:p>
-            <a:r>
-              <a:rPr kumimoji="0" lang="en-US" smtClean="0"/>
+          <a:lstStyle/>
+          <a:p>
+            <a:r>
+              <a:rPr kumimoji="0" lang="en-US"/>
               <a:t>Click to edit Master title style</a:t>
             </a:r>
-            <a:endParaRPr kumimoji="0" lang="en-US"/>
           </a:p>
         </p:txBody>
       </p:sp>
@@ -4461,41 +4335,39 @@
         </p:spPr>
         <p:txBody>
           <a:bodyPr vert="eaVert"/>
-          <a:lstStyle>
-            <a:extLst/>
-          </a:lstStyle>
+          <a:lstStyle/>
           <a:p>
             <a:pPr lvl="0" eaLnBrk="1" latinLnBrk="0" hangingPunct="1"/>
             <a:r>
-              <a:rPr lang="en-US" smtClean="0"/>
+              <a:rPr lang="en-US"/>
               <a:t>Click to edit Master text styles</a:t>
             </a:r>
           </a:p>
           <a:p>
             <a:pPr lvl="1" eaLnBrk="1" latinLnBrk="0" hangingPunct="1"/>
             <a:r>
-              <a:rPr lang="en-US" smtClean="0"/>
+              <a:rPr lang="en-US"/>
               <a:t>Second level</a:t>
             </a:r>
           </a:p>
           <a:p>
             <a:pPr lvl="2" eaLnBrk="1" latinLnBrk="0" hangingPunct="1"/>
             <a:r>
-              <a:rPr lang="en-US" smtClean="0"/>
+              <a:rPr lang="en-US"/>
               <a:t>Third level</a:t>
             </a:r>
           </a:p>
           <a:p>
             <a:pPr lvl="3" eaLnBrk="1" latinLnBrk="0" hangingPunct="1"/>
             <a:r>
-              <a:rPr lang="en-US" smtClean="0"/>
+              <a:rPr lang="en-US"/>
               <a:t>Fourth level</a:t>
             </a:r>
           </a:p>
           <a:p>
             <a:pPr lvl="4" eaLnBrk="1" latinLnBrk="0" hangingPunct="1"/>
             <a:r>
-              <a:rPr lang="en-US" smtClean="0"/>
+              <a:rPr lang="en-US"/>
               <a:t>Fifth level</a:t>
             </a:r>
             <a:endParaRPr kumimoji="0" lang="en-US"/>
@@ -4515,13 +4387,11 @@
         <p:spPr/>
         <p:txBody>
           <a:bodyPr/>
-          <a:lstStyle>
-            <a:extLst/>
-          </a:lstStyle>
+          <a:lstStyle/>
           <a:p>
             <a:fld id="{05A7C28B-237A-4A16-A330-F744D93506D6}" type="datetime1">
               <a:rPr lang="en-US" smtClean="0"/>
-              <a:t>8/19/2024</a:t>
+              <a:t>12/27/2025</a:t>
             </a:fld>
             <a:endParaRPr lang="en-US"/>
           </a:p>
@@ -4540,15 +4410,12 @@
         <p:spPr/>
         <p:txBody>
           <a:bodyPr/>
-          <a:lstStyle>
-            <a:extLst/>
-          </a:lstStyle>
-          <a:p>
-            <a:r>
-              <a:rPr lang="en-US" smtClean="0"/>
+          <a:lstStyle/>
+          <a:p>
+            <a:r>
+              <a:rPr lang="en-US"/>
               <a:t>Memory-Mapped SPM</a:t>
             </a:r>
-            <a:endParaRPr lang="en-US"/>
           </a:p>
         </p:txBody>
       </p:sp>
@@ -4565,9 +4432,7 @@
         <p:spPr/>
         <p:txBody>
           <a:bodyPr/>
-          <a:lstStyle>
-            <a:extLst/>
-          </a:lstStyle>
+          <a:lstStyle/>
           <a:p>
             <a:fld id="{B6F15528-21DE-4FAA-801E-634DDDAF4B2B}" type="slidenum">
               <a:rPr lang="en-US" smtClean="0"/>
@@ -4628,10 +4493,9 @@
           </a:lstStyle>
           <a:p>
             <a:r>
-              <a:rPr lang="en-US" smtClean="0"/>
+              <a:rPr lang="en-US"/>
               <a:t>Click to edit Master title style</a:t>
             </a:r>
-            <a:endParaRPr lang="en-US"/>
           </a:p>
         </p:txBody>
       </p:sp>
@@ -4748,7 +4612,7 @@
           <a:p>
             <a:pPr lvl="0"/>
             <a:r>
-              <a:rPr lang="en-US" smtClean="0"/>
+              <a:rPr lang="en-US"/>
               <a:t>Click to edit Master text styles</a:t>
             </a:r>
           </a:p>
@@ -4771,7 +4635,7 @@
           <a:p>
             <a:fld id="{945E2AE1-CBD5-460D-A0C9-6147C2D4C470}" type="datetime1">
               <a:rPr lang="en-US" smtClean="0"/>
-              <a:t>8/19/2024</a:t>
+              <a:t>12/27/2025</a:t>
             </a:fld>
             <a:endParaRPr lang="en-US"/>
           </a:p>
@@ -4793,10 +4657,9 @@
           <a:lstStyle/>
           <a:p>
             <a:r>
-              <a:rPr lang="en-US" smtClean="0"/>
+              <a:rPr lang="en-US"/>
               <a:t>Memory-Mapped SPM</a:t>
             </a:r>
-            <a:endParaRPr lang="en-US"/>
           </a:p>
         </p:txBody>
       </p:sp>
@@ -4829,13 +4692,6 @@
   <p:clrMapOvr>
     <a:masterClrMapping/>
   </p:clrMapOvr>
-  <p:timing>
-    <p:tnLst>
-      <p:par>
-        <p:cTn id="1" dur="indefinite" restart="never" nodeType="tmRoot"/>
-      </p:par>
-    </p:tnLst>
-  </p:timing>
 </p:sldLayout>
 </file>
 
@@ -4872,10 +4728,9 @@
           <a:lstStyle/>
           <a:p>
             <a:r>
-              <a:rPr lang="en-US" smtClean="0"/>
+              <a:rPr lang="en-US"/>
               <a:t>Click to edit Master title style</a:t>
             </a:r>
-            <a:endParaRPr lang="en-US"/>
           </a:p>
         </p:txBody>
       </p:sp>
@@ -4929,38 +4784,37 @@
           <a:p>
             <a:pPr lvl="0"/>
             <a:r>
-              <a:rPr lang="en-US" smtClean="0"/>
+              <a:rPr lang="en-US"/>
               <a:t>Click to edit Master text styles</a:t>
             </a:r>
           </a:p>
           <a:p>
             <a:pPr lvl="1"/>
             <a:r>
-              <a:rPr lang="en-US" smtClean="0"/>
+              <a:rPr lang="en-US"/>
               <a:t>Second level</a:t>
             </a:r>
           </a:p>
           <a:p>
             <a:pPr lvl="2"/>
             <a:r>
-              <a:rPr lang="en-US" smtClean="0"/>
+              <a:rPr lang="en-US"/>
               <a:t>Third level</a:t>
             </a:r>
           </a:p>
           <a:p>
             <a:pPr lvl="3"/>
             <a:r>
-              <a:rPr lang="en-US" smtClean="0"/>
+              <a:rPr lang="en-US"/>
               <a:t>Fourth level</a:t>
             </a:r>
           </a:p>
           <a:p>
             <a:pPr lvl="4"/>
             <a:r>
-              <a:rPr lang="en-US" smtClean="0"/>
+              <a:rPr lang="en-US"/>
               <a:t>Fifth level</a:t>
             </a:r>
-            <a:endParaRPr lang="en-US"/>
           </a:p>
         </p:txBody>
       </p:sp>
@@ -5014,38 +4868,37 @@
           <a:p>
             <a:pPr lvl="0"/>
             <a:r>
-              <a:rPr lang="en-US" smtClean="0"/>
+              <a:rPr lang="en-US"/>
               <a:t>Click to edit Master text styles</a:t>
             </a:r>
           </a:p>
           <a:p>
             <a:pPr lvl="1"/>
             <a:r>
-              <a:rPr lang="en-US" smtClean="0"/>
+              <a:rPr lang="en-US"/>
               <a:t>Second level</a:t>
             </a:r>
           </a:p>
           <a:p>
             <a:pPr lvl="2"/>
             <a:r>
-              <a:rPr lang="en-US" smtClean="0"/>
+              <a:rPr lang="en-US"/>
               <a:t>Third level</a:t>
             </a:r>
           </a:p>
           <a:p>
             <a:pPr lvl="3"/>
             <a:r>
-              <a:rPr lang="en-US" smtClean="0"/>
+              <a:rPr lang="en-US"/>
               <a:t>Fourth level</a:t>
             </a:r>
           </a:p>
           <a:p>
             <a:pPr lvl="4"/>
             <a:r>
-              <a:rPr lang="en-US" smtClean="0"/>
+              <a:rPr lang="en-US"/>
               <a:t>Fifth level</a:t>
             </a:r>
-            <a:endParaRPr lang="en-US"/>
           </a:p>
         </p:txBody>
       </p:sp>
@@ -5054,13 +4907,6 @@
   <p:clrMapOvr>
     <a:masterClrMapping/>
   </p:clrMapOvr>
-  <p:timing>
-    <p:tnLst>
-      <p:par>
-        <p:cTn id="1" dur="indefinite" restart="never" nodeType="tmRoot"/>
-      </p:par>
-    </p:tnLst>
-  </p:timing>
 </p:sldLayout>
 </file>
 
@@ -5101,10 +4947,9 @@
           </a:lstStyle>
           <a:p>
             <a:r>
-              <a:rPr lang="en-US" smtClean="0"/>
+              <a:rPr lang="en-US"/>
               <a:t>Click to edit Master title style</a:t>
             </a:r>
-            <a:endParaRPr lang="en-US"/>
           </a:p>
         </p:txBody>
       </p:sp>
@@ -5167,7 +5012,7 @@
           <a:p>
             <a:pPr lvl="0"/>
             <a:r>
-              <a:rPr lang="en-US" smtClean="0"/>
+              <a:rPr lang="en-US"/>
               <a:t>Click to edit Master text styles</a:t>
             </a:r>
           </a:p>
@@ -5223,38 +5068,37 @@
           <a:p>
             <a:pPr lvl="0"/>
             <a:r>
-              <a:rPr lang="en-US" smtClean="0"/>
+              <a:rPr lang="en-US"/>
               <a:t>Click to edit Master text styles</a:t>
             </a:r>
           </a:p>
           <a:p>
             <a:pPr lvl="1"/>
             <a:r>
-              <a:rPr lang="en-US" smtClean="0"/>
+              <a:rPr lang="en-US"/>
               <a:t>Second level</a:t>
             </a:r>
           </a:p>
           <a:p>
             <a:pPr lvl="2"/>
             <a:r>
-              <a:rPr lang="en-US" smtClean="0"/>
+              <a:rPr lang="en-US"/>
               <a:t>Third level</a:t>
             </a:r>
           </a:p>
           <a:p>
             <a:pPr lvl="3"/>
             <a:r>
-              <a:rPr lang="en-US" smtClean="0"/>
+              <a:rPr lang="en-US"/>
               <a:t>Fourth level</a:t>
             </a:r>
           </a:p>
           <a:p>
             <a:pPr lvl="4"/>
             <a:r>
-              <a:rPr lang="en-US" smtClean="0"/>
+              <a:rPr lang="en-US"/>
               <a:t>Fifth level</a:t>
             </a:r>
-            <a:endParaRPr lang="en-US"/>
           </a:p>
         </p:txBody>
       </p:sp>
@@ -5317,7 +5161,7 @@
           <a:p>
             <a:pPr lvl="0"/>
             <a:r>
-              <a:rPr lang="en-US" smtClean="0"/>
+              <a:rPr lang="en-US"/>
               <a:t>Click to edit Master text styles</a:t>
             </a:r>
           </a:p>
@@ -5373,38 +5217,37 @@
           <a:p>
             <a:pPr lvl="0"/>
             <a:r>
-              <a:rPr lang="en-US" smtClean="0"/>
+              <a:rPr lang="en-US"/>
               <a:t>Click to edit Master text styles</a:t>
             </a:r>
           </a:p>
           <a:p>
             <a:pPr lvl="1"/>
             <a:r>
-              <a:rPr lang="en-US" smtClean="0"/>
+              <a:rPr lang="en-US"/>
               <a:t>Second level</a:t>
             </a:r>
           </a:p>
           <a:p>
             <a:pPr lvl="2"/>
             <a:r>
-              <a:rPr lang="en-US" smtClean="0"/>
+              <a:rPr lang="en-US"/>
               <a:t>Third level</a:t>
             </a:r>
           </a:p>
           <a:p>
             <a:pPr lvl="3"/>
             <a:r>
-              <a:rPr lang="en-US" smtClean="0"/>
+              <a:rPr lang="en-US"/>
               <a:t>Fourth level</a:t>
             </a:r>
           </a:p>
           <a:p>
             <a:pPr lvl="4"/>
             <a:r>
-              <a:rPr lang="en-US" smtClean="0"/>
+              <a:rPr lang="en-US"/>
               <a:t>Fifth level</a:t>
             </a:r>
-            <a:endParaRPr lang="en-US"/>
           </a:p>
         </p:txBody>
       </p:sp>
@@ -5425,7 +5268,7 @@
           <a:p>
             <a:fld id="{B2CFB3A9-0A90-4E79-85FA-03828B308331}" type="datetime1">
               <a:rPr lang="en-US" smtClean="0"/>
-              <a:t>8/19/2024</a:t>
+              <a:t>12/27/2025</a:t>
             </a:fld>
             <a:endParaRPr lang="en-US"/>
           </a:p>
@@ -5447,10 +5290,9 @@
           <a:lstStyle/>
           <a:p>
             <a:r>
-              <a:rPr lang="en-US" smtClean="0"/>
+              <a:rPr lang="en-US"/>
               <a:t>Memory-Mapped SPM</a:t>
             </a:r>
-            <a:endParaRPr lang="en-US"/>
           </a:p>
         </p:txBody>
       </p:sp>
@@ -5519,10 +5361,9 @@
           <a:lstStyle/>
           <a:p>
             <a:r>
-              <a:rPr lang="en-US" smtClean="0"/>
+              <a:rPr lang="en-US"/>
               <a:t>Click to edit Master title style</a:t>
             </a:r>
-            <a:endParaRPr lang="en-US"/>
           </a:p>
         </p:txBody>
       </p:sp>
@@ -5543,7 +5384,7 @@
           <a:p>
             <a:fld id="{5BA5B4FA-0F9A-436F-AA41-B89FAC163798}" type="datetime1">
               <a:rPr lang="en-US" smtClean="0"/>
-              <a:t>8/19/2024</a:t>
+              <a:t>12/27/2025</a:t>
             </a:fld>
             <a:endParaRPr lang="en-US"/>
           </a:p>
@@ -5565,10 +5406,9 @@
           <a:lstStyle/>
           <a:p>
             <a:r>
-              <a:rPr lang="en-US" smtClean="0"/>
+              <a:rPr lang="en-US"/>
               <a:t>Memory-Mapped SPM</a:t>
             </a:r>
-            <a:endParaRPr lang="en-US"/>
           </a:p>
         </p:txBody>
       </p:sp>
@@ -5638,7 +5478,7 @@
           <a:p>
             <a:fld id="{B71C8B55-203E-4F94-AE03-50CFB6BD790A}" type="datetime1">
               <a:rPr lang="en-US" smtClean="0"/>
-              <a:t>8/19/2024</a:t>
+              <a:t>12/27/2025</a:t>
             </a:fld>
             <a:endParaRPr lang="en-US"/>
           </a:p>
@@ -5660,10 +5500,9 @@
           <a:lstStyle/>
           <a:p>
             <a:r>
-              <a:rPr lang="en-US" smtClean="0"/>
+              <a:rPr lang="en-US"/>
               <a:t>Memory-Mapped SPM</a:t>
             </a:r>
-            <a:endParaRPr lang="en-US"/>
           </a:p>
         </p:txBody>
       </p:sp>
@@ -5741,10 +5580,9 @@
           </a:lstStyle>
           <a:p>
             <a:r>
-              <a:rPr lang="en-US" smtClean="0"/>
+              <a:rPr lang="en-US"/>
               <a:t>Click to edit Master title style</a:t>
             </a:r>
-            <a:endParaRPr lang="en-US"/>
           </a:p>
         </p:txBody>
       </p:sp>
@@ -5798,38 +5636,37 @@
           <a:p>
             <a:pPr lvl="0"/>
             <a:r>
-              <a:rPr lang="en-US" smtClean="0"/>
+              <a:rPr lang="en-US"/>
               <a:t>Click to edit Master text styles</a:t>
             </a:r>
           </a:p>
           <a:p>
             <a:pPr lvl="1"/>
             <a:r>
-              <a:rPr lang="en-US" smtClean="0"/>
+              <a:rPr lang="en-US"/>
               <a:t>Second level</a:t>
             </a:r>
           </a:p>
           <a:p>
             <a:pPr lvl="2"/>
             <a:r>
-              <a:rPr lang="en-US" smtClean="0"/>
+              <a:rPr lang="en-US"/>
               <a:t>Third level</a:t>
             </a:r>
           </a:p>
           <a:p>
             <a:pPr lvl="3"/>
             <a:r>
-              <a:rPr lang="en-US" smtClean="0"/>
+              <a:rPr lang="en-US"/>
               <a:t>Fourth level</a:t>
             </a:r>
           </a:p>
           <a:p>
             <a:pPr lvl="4"/>
             <a:r>
-              <a:rPr lang="en-US" smtClean="0"/>
+              <a:rPr lang="en-US"/>
               <a:t>Fifth level</a:t>
             </a:r>
-            <a:endParaRPr lang="en-US"/>
           </a:p>
         </p:txBody>
       </p:sp>
@@ -5892,7 +5729,7 @@
           <a:p>
             <a:pPr lvl="0"/>
             <a:r>
-              <a:rPr lang="en-US" smtClean="0"/>
+              <a:rPr lang="en-US"/>
               <a:t>Click to edit Master text styles</a:t>
             </a:r>
           </a:p>
@@ -5915,7 +5752,7 @@
           <a:p>
             <a:fld id="{897536A8-DE7E-4A16-B194-971EA3CF9026}" type="datetime1">
               <a:rPr lang="en-US" smtClean="0"/>
-              <a:t>8/19/2024</a:t>
+              <a:t>12/27/2025</a:t>
             </a:fld>
             <a:endParaRPr lang="en-US"/>
           </a:p>
@@ -5937,10 +5774,9 @@
           <a:lstStyle/>
           <a:p>
             <a:r>
-              <a:rPr lang="en-US" smtClean="0"/>
+              <a:rPr lang="en-US"/>
               <a:t>Memory-Mapped SPM</a:t>
             </a:r>
-            <a:endParaRPr lang="en-US"/>
           </a:p>
         </p:txBody>
       </p:sp>
@@ -6018,10 +5854,9 @@
           </a:lstStyle>
           <a:p>
             <a:r>
-              <a:rPr lang="en-US" smtClean="0"/>
+              <a:rPr lang="en-US"/>
               <a:t>Click to edit Master title style</a:t>
             </a:r>
-            <a:endParaRPr lang="en-US"/>
           </a:p>
         </p:txBody>
       </p:sp>
@@ -6145,7 +5980,7 @@
           <a:p>
             <a:pPr lvl="0"/>
             <a:r>
-              <a:rPr lang="en-US" smtClean="0"/>
+              <a:rPr lang="en-US"/>
               <a:t>Click to edit Master text styles</a:t>
             </a:r>
           </a:p>
@@ -6168,7 +6003,7 @@
           <a:p>
             <a:fld id="{F5C96671-0698-4B48-8CC8-45A9BDA6F14F}" type="datetime1">
               <a:rPr lang="en-US" smtClean="0"/>
-              <a:t>8/19/2024</a:t>
+              <a:t>12/27/2025</a:t>
             </a:fld>
             <a:endParaRPr lang="en-US"/>
           </a:p>
@@ -6190,10 +6025,9 @@
           <a:lstStyle/>
           <a:p>
             <a:r>
-              <a:rPr lang="en-US" smtClean="0"/>
+              <a:rPr lang="en-US"/>
               <a:t>Memory-Mapped SPM</a:t>
             </a:r>
-            <a:endParaRPr lang="en-US"/>
           </a:p>
         </p:txBody>
       </p:sp>
@@ -6286,10 +6120,9 @@
           <a:lstStyle/>
           <a:p>
             <a:r>
-              <a:rPr lang="en-US" smtClean="0"/>
+              <a:rPr lang="en-US"/>
               <a:t>Click to edit Master title style</a:t>
             </a:r>
-            <a:endParaRPr lang="en-US"/>
           </a:p>
         </p:txBody>
       </p:sp>
@@ -6320,38 +6153,37 @@
           <a:p>
             <a:pPr lvl="0"/>
             <a:r>
-              <a:rPr lang="en-US" smtClean="0"/>
+              <a:rPr lang="en-US"/>
               <a:t>Click to edit Master text styles</a:t>
             </a:r>
           </a:p>
           <a:p>
             <a:pPr lvl="1"/>
             <a:r>
-              <a:rPr lang="en-US" smtClean="0"/>
+              <a:rPr lang="en-US"/>
               <a:t>Second level</a:t>
             </a:r>
           </a:p>
           <a:p>
             <a:pPr lvl="2"/>
             <a:r>
-              <a:rPr lang="en-US" smtClean="0"/>
+              <a:rPr lang="en-US"/>
               <a:t>Third level</a:t>
             </a:r>
           </a:p>
           <a:p>
             <a:pPr lvl="3"/>
             <a:r>
-              <a:rPr lang="en-US" smtClean="0"/>
+              <a:rPr lang="en-US"/>
               <a:t>Fourth level</a:t>
             </a:r>
           </a:p>
           <a:p>
             <a:pPr lvl="4"/>
             <a:r>
-              <a:rPr lang="en-US" smtClean="0"/>
+              <a:rPr lang="en-US"/>
               <a:t>Fifth level</a:t>
             </a:r>
-            <a:endParaRPr lang="en-US"/>
           </a:p>
         </p:txBody>
       </p:sp>
@@ -6390,7 +6222,7 @@
           <a:p>
             <a:fld id="{26FAABE3-8527-4979-BA7D-5506EF11427A}" type="datetime1">
               <a:rPr lang="en-US" smtClean="0"/>
-              <a:t>8/19/2024</a:t>
+              <a:t>12/27/2025</a:t>
             </a:fld>
             <a:endParaRPr lang="en-US"/>
           </a:p>
@@ -6430,10 +6262,9 @@
           </a:lstStyle>
           <a:p>
             <a:r>
-              <a:rPr lang="en-US" smtClean="0"/>
+              <a:rPr lang="en-US"/>
               <a:t>Memory-Mapped SPM</a:t>
             </a:r>
-            <a:endParaRPr lang="en-US"/>
           </a:p>
         </p:txBody>
       </p:sp>
@@ -6855,9 +6686,7 @@
         </p:style>
         <p:txBody>
           <a:bodyPr anchor="ctr"/>
-          <a:lstStyle>
-            <a:extLst/>
-          </a:lstStyle>
+          <a:lstStyle/>
           <a:p>
             <a:pPr algn="ctr" eaLnBrk="1" latinLnBrk="0" hangingPunct="1"/>
             <a:endParaRPr kumimoji="0" lang="en-US"/>
@@ -6927,9 +6756,7 @@
         </p:style>
         <p:txBody>
           <a:bodyPr anchor="ctr"/>
-          <a:lstStyle>
-            <a:extLst/>
-          </a:lstStyle>
+          <a:lstStyle/>
           <a:p>
             <a:pPr algn="ctr" eaLnBrk="1" latinLnBrk="0" hangingPunct="1"/>
             <a:endParaRPr kumimoji="0" lang="en-US"/>
@@ -6959,15 +6786,12 @@
           <a:bodyPr vert="horz" anchor="b">
             <a:normAutofit/>
           </a:bodyPr>
-          <a:lstStyle>
-            <a:extLst/>
-          </a:lstStyle>
-          <a:p>
-            <a:r>
-              <a:rPr kumimoji="0" lang="en-US" smtClean="0"/>
+          <a:lstStyle/>
+          <a:p>
+            <a:r>
+              <a:rPr kumimoji="0" lang="en-US"/>
               <a:t>Click to edit Master title style</a:t>
             </a:r>
-            <a:endParaRPr kumimoji="0" lang="en-US"/>
           </a:p>
         </p:txBody>
       </p:sp>
@@ -6994,44 +6818,41 @@
           <a:bodyPr vert="horz" lIns="182880" tIns="91440">
             <a:normAutofit/>
           </a:bodyPr>
-          <a:lstStyle>
-            <a:extLst/>
-          </a:lstStyle>
+          <a:lstStyle/>
           <a:p>
             <a:pPr lvl="0" eaLnBrk="1" latinLnBrk="0" hangingPunct="1"/>
             <a:r>
-              <a:rPr kumimoji="0" lang="en-US" smtClean="0"/>
+              <a:rPr kumimoji="0" lang="en-US"/>
               <a:t>Click to edit Master text styles</a:t>
             </a:r>
           </a:p>
           <a:p>
             <a:pPr lvl="1" eaLnBrk="1" latinLnBrk="0" hangingPunct="1"/>
             <a:r>
-              <a:rPr kumimoji="0" lang="en-US" smtClean="0"/>
+              <a:rPr kumimoji="0" lang="en-US"/>
               <a:t>Second level</a:t>
             </a:r>
           </a:p>
           <a:p>
             <a:pPr lvl="2" eaLnBrk="1" latinLnBrk="0" hangingPunct="1"/>
             <a:r>
-              <a:rPr kumimoji="0" lang="en-US" smtClean="0"/>
+              <a:rPr kumimoji="0" lang="en-US"/>
               <a:t>Third level</a:t>
             </a:r>
           </a:p>
           <a:p>
             <a:pPr lvl="3" eaLnBrk="1" latinLnBrk="0" hangingPunct="1"/>
             <a:r>
-              <a:rPr kumimoji="0" lang="en-US" smtClean="0"/>
+              <a:rPr kumimoji="0" lang="en-US"/>
               <a:t>Fourth level</a:t>
             </a:r>
           </a:p>
           <a:p>
             <a:pPr lvl="4" eaLnBrk="1" latinLnBrk="0" hangingPunct="1"/>
             <a:r>
-              <a:rPr kumimoji="0" lang="en-US" smtClean="0"/>
+              <a:rPr kumimoji="0" lang="en-US"/>
               <a:t>Fifth level</a:t>
             </a:r>
-            <a:endParaRPr kumimoji="0" lang="en-US"/>
           </a:p>
         </p:txBody>
       </p:sp>
@@ -7071,7 +6892,7 @@
           <a:p>
             <a:fld id="{A27B6C89-3F9A-4856-B9C8-0FA30DF0136D}" type="datetime1">
               <a:rPr lang="en-US" smtClean="0"/>
-              <a:t>8/19/2024</a:t>
+              <a:t>12/27/2025</a:t>
             </a:fld>
             <a:endParaRPr lang="en-US"/>
           </a:p>
@@ -7112,10 +6933,9 @@
           </a:lstStyle>
           <a:p>
             <a:r>
-              <a:rPr lang="en-US" smtClean="0"/>
+              <a:rPr lang="en-US"/>
               <a:t>Memory-Mapped SPM</a:t>
             </a:r>
-            <a:endParaRPr lang="en-US"/>
           </a:p>
         </p:txBody>
       </p:sp>
@@ -7575,32 +7395,10 @@
                 <a:latin typeface="Times New Roman" pitchFamily="18" charset="0"/>
                 <a:cs typeface="B Titr" panose="00000700000000000000" pitchFamily="2" charset="-78"/>
               </a:rPr>
-              <a:t>Microprocessors and Assembly </a:t>
-            </a:r>
-            <a:r>
-              <a:rPr lang="en-US" sz="3200" dirty="0" smtClean="0">
-                <a:solidFill>
-                  <a:srgbClr val="C00000"/>
-                </a:solidFill>
-                <a:effectLst/>
-                <a:latin typeface="Times New Roman" pitchFamily="18" charset="0"/>
-                <a:cs typeface="B Titr" panose="00000700000000000000" pitchFamily="2" charset="-78"/>
-              </a:rPr>
-              <a:t>Language</a:t>
-            </a:r>
-            <a:r>
-              <a:rPr lang="en-US" sz="2400" dirty="0" smtClean="0">
-                <a:solidFill>
-                  <a:srgbClr val="C00000"/>
-                </a:solidFill>
-                <a:effectLst/>
-                <a:latin typeface="Times New Roman" pitchFamily="18" charset="0"/>
-                <a:cs typeface="B Titr" panose="00000700000000000000" pitchFamily="2" charset="-78"/>
-              </a:rPr>
-              <a:t/>
+              <a:t>Microprocessors and Assembly Language</a:t>
             </a:r>
             <a:br>
-              <a:rPr lang="en-US" sz="2400" dirty="0" smtClean="0">
+              <a:rPr lang="en-US" sz="2400" dirty="0">
                 <a:solidFill>
                   <a:srgbClr val="C00000"/>
                 </a:solidFill>
@@ -7610,7 +7408,7 @@
               </a:rPr>
             </a:br>
             <a:r>
-              <a:rPr lang="en-US" sz="2400" dirty="0" smtClean="0">
+              <a:rPr lang="en-US" sz="2400" dirty="0">
                 <a:solidFill>
                   <a:srgbClr val="C00000"/>
                 </a:solidFill>
@@ -7621,7 +7419,7 @@
               <a:t> </a:t>
             </a:r>
             <a:r>
-              <a:rPr lang="en-US" sz="2000" b="0" dirty="0" smtClean="0">
+              <a:rPr lang="en-US" sz="2000" b="0" dirty="0">
                 <a:solidFill>
                   <a:srgbClr val="130868"/>
                 </a:solidFill>
@@ -7853,7 +7651,7 @@
               </a:spcAft>
             </a:pPr>
             <a:r>
-              <a:rPr lang="en-US" sz="2400" b="1" dirty="0" smtClean="0">
+              <a:rPr lang="en-US" sz="2400" b="1" dirty="0">
                 <a:latin typeface="Calibri" panose="020F0502020204030204" pitchFamily="34" charset="0"/>
                 <a:cs typeface="B Titr" pitchFamily="2" charset="-78"/>
               </a:rPr>
@@ -7867,7 +7665,7 @@
               </a:spcAft>
             </a:pPr>
             <a:r>
-              <a:rPr lang="en-US" b="1" dirty="0" smtClean="0">
+              <a:rPr lang="en-US" b="1" dirty="0">
                 <a:latin typeface="Calibri" panose="020F0502020204030204" pitchFamily="34" charset="0"/>
                 <a:cs typeface="B Titr" pitchFamily="2" charset="-78"/>
               </a:rPr>
@@ -7889,14 +7687,7 @@
                 <a:latin typeface="Calibri" panose="020F0502020204030204" pitchFamily="34" charset="0"/>
                 <a:cs typeface="B Titr" pitchFamily="2" charset="-78"/>
               </a:rPr>
-              <a:t>Department of Computer </a:t>
-            </a:r>
-            <a:r>
-              <a:rPr lang="en-US" sz="2000" dirty="0" smtClean="0">
-                <a:latin typeface="Calibri" panose="020F0502020204030204" pitchFamily="34" charset="0"/>
-                <a:cs typeface="B Titr" pitchFamily="2" charset="-78"/>
-              </a:rPr>
-              <a:t>Engineering</a:t>
+              <a:t>Department of Computer Engineering</a:t>
             </a:r>
           </a:p>
           <a:p>
@@ -7910,14 +7701,7 @@
                 <a:latin typeface="Calibri" panose="020F0502020204030204" pitchFamily="34" charset="0"/>
                 <a:cs typeface="B Titr" pitchFamily="2" charset="-78"/>
               </a:rPr>
-              <a:t>Amirkabir University of </a:t>
-            </a:r>
-            <a:r>
-              <a:rPr lang="en-US" sz="2000" dirty="0" smtClean="0">
-                <a:latin typeface="Calibri" panose="020F0502020204030204" pitchFamily="34" charset="0"/>
-                <a:cs typeface="B Titr" pitchFamily="2" charset="-78"/>
-              </a:rPr>
-              <a:t>Technology</a:t>
+              <a:t>Amirkabir University of Technology</a:t>
             </a:r>
           </a:p>
           <a:p>
@@ -7927,16 +7711,12 @@
               </a:lnSpc>
             </a:pPr>
             <a:r>
-              <a:rPr lang="en-US" sz="2000" dirty="0" smtClean="0">
+              <a:rPr lang="en-US" sz="2000" dirty="0">
                 <a:latin typeface="Calibri" panose="020F0502020204030204" pitchFamily="34" charset="0"/>
                 <a:cs typeface="B Titr" pitchFamily="2" charset="-78"/>
               </a:rPr>
               <a:t>Lecture 12</a:t>
             </a:r>
-            <a:endParaRPr lang="en-US" sz="2000" dirty="0">
-              <a:latin typeface="Calibri" panose="020F0502020204030204" pitchFamily="34" charset="0"/>
-              <a:cs typeface="B Titr" pitchFamily="2" charset="-78"/>
-            </a:endParaRPr>
           </a:p>
         </p:txBody>
       </p:sp>
@@ -7950,21 +7730,6 @@
   <p:clrMapOvr>
     <a:masterClrMapping/>
   </p:clrMapOvr>
-  <mc:AlternateContent xmlns:mc="http://schemas.openxmlformats.org/markup-compatibility/2006" xmlns:p14="http://schemas.microsoft.com/office/powerpoint/2010/main">
-    <mc:Choice Requires="p14">
-      <p:transition spd="slow" p14:dur="2000"/>
-    </mc:Choice>
-    <mc:Fallback xmlns="">
-      <p:transition spd="slow"/>
-    </mc:Fallback>
-  </mc:AlternateContent>
-  <p:timing>
-    <p:tnLst>
-      <p:par>
-        <p:cTn id="1" dur="indefinite" restart="never" nodeType="tmRoot"/>
-      </p:par>
-    </p:tnLst>
-  </p:timing>
 </p:sld>
 </file>
 
@@ -8056,14 +7821,11 @@
           <a:p>
             <a:pPr algn="ctr" rtl="1"/>
             <a:r>
-              <a:rPr lang="en-US" sz="1400" dirty="0" smtClean="0">
+              <a:rPr lang="en-US" sz="1400" dirty="0">
                 <a:cs typeface="B Titr" panose="00000700000000000000" pitchFamily="2" charset="-78"/>
               </a:rPr>
               <a:t>Microprocessors and Assembly Language, Fall 2024, AUT, Tehran, Iran </a:t>
             </a:r>
-            <a:endParaRPr lang="en-US" sz="1400" dirty="0">
-              <a:cs typeface="B Titr" panose="00000700000000000000" pitchFamily="2" charset="-78"/>
-            </a:endParaRPr>
           </a:p>
         </p:txBody>
       </p:sp>
@@ -8095,10 +7857,10 @@
               </a:lnSpc>
             </a:pPr>
             <a:r>
-              <a:rPr lang="en-US" sz="4000" b="1" dirty="0" smtClean="0"/>
+              <a:rPr lang="en-US" sz="4000" b="1" dirty="0"/>
               <a:t>The End!</a:t>
             </a:r>
-            <a:endParaRPr lang="en-US" sz="3200" b="1" dirty="0" smtClean="0"/>
+            <a:endParaRPr lang="en-US" sz="3200" b="1" dirty="0"/>
           </a:p>
         </p:txBody>
       </p:sp>
@@ -8112,21 +7874,6 @@
   <p:clrMapOvr>
     <a:overrideClrMapping bg1="lt1" tx1="dk1" bg2="lt2" tx2="dk2" accent1="accent1" accent2="accent2" accent3="accent3" accent4="accent4" accent5="accent5" accent6="accent6" hlink="hlink" folHlink="folHlink"/>
   </p:clrMapOvr>
-  <mc:AlternateContent xmlns:mc="http://schemas.openxmlformats.org/markup-compatibility/2006" xmlns:p14="http://schemas.microsoft.com/office/powerpoint/2010/main">
-    <mc:Choice Requires="p14">
-      <p:transition spd="slow" p14:dur="2000"/>
-    </mc:Choice>
-    <mc:Fallback xmlns="">
-      <p:transition spd="slow"/>
-    </mc:Fallback>
-  </mc:AlternateContent>
-  <p:timing>
-    <p:tnLst>
-      <p:par>
-        <p:cTn id="1" dur="indefinite" restart="never" nodeType="tmRoot"/>
-      </p:par>
-    </p:tnLst>
-  </p:timing>
 </p:sld>
 </file>
 
@@ -8231,7 +7978,7 @@
           <a:lstStyle/>
           <a:p>
             <a:r>
-              <a:rPr lang="en-US" sz="2000" b="1" dirty="0" smtClean="0"/>
+              <a:rPr lang="en-US" sz="2000" b="1" dirty="0"/>
               <a:t>Parts (text &amp; figures) of this lecture are adopted from:</a:t>
             </a:r>
           </a:p>
@@ -8262,16 +8009,9 @@
                 <a:cs typeface="B Nazanin" pitchFamily="2" charset="-78"/>
                 <a:hlinkClick r:id="rId2"/>
               </a:rPr>
-              <a:t>https://www.analogictips.com/pulse-width-modulation-pwm</a:t>
-            </a:r>
-            <a:r>
-              <a:rPr lang="en-US" sz="2000" b="1" dirty="0" smtClean="0">
-                <a:cs typeface="B Nazanin" pitchFamily="2" charset="-78"/>
-                <a:hlinkClick r:id="rId2"/>
-              </a:rPr>
-              <a:t>/</a:t>
-            </a:r>
-            <a:endParaRPr lang="en-US" sz="2000" b="1" dirty="0" smtClean="0">
+              <a:t>https://www.analogictips.com/pulse-width-modulation-pwm/</a:t>
+            </a:r>
+            <a:endParaRPr lang="en-US" sz="2000" b="1" dirty="0">
               <a:cs typeface="B Nazanin" pitchFamily="2" charset="-78"/>
             </a:endParaRPr>
           </a:p>
@@ -8296,22 +8036,10 @@
               <a:buChar char="•"/>
             </a:pPr>
             <a:r>
-              <a:rPr lang="en-US" sz="2000" b="1" dirty="0" smtClean="0">
-                <a:cs typeface="B Nazanin" pitchFamily="2" charset="-78"/>
-              </a:rPr>
-              <a:t>Atmel </a:t>
-            </a:r>
-            <a:r>
               <a:rPr lang="en-US" sz="2000" b="1" dirty="0">
                 <a:cs typeface="B Nazanin" pitchFamily="2" charset="-78"/>
               </a:rPr>
-              <a:t>| SMART ARM-based MCU DATASHEET, SAM3X / SAM3A Series, </a:t>
-            </a:r>
-            <a:r>
-              <a:rPr lang="en-US" sz="2000" b="1" dirty="0" smtClean="0">
-                <a:cs typeface="B Nazanin" pitchFamily="2" charset="-78"/>
-              </a:rPr>
-              <a:t>Atmel-11057C-ATARM-SAM3X-SAM3A-Datasheet_23-Mar-15</a:t>
+              <a:t>Atmel | SMART ARM-based MCU DATASHEET, SAM3X / SAM3A Series, Atmel-11057C-ATARM-SAM3X-SAM3A-Datasheet_23-Mar-15</a:t>
             </a:r>
           </a:p>
           <a:p>
@@ -8351,14 +8079,11 @@
           <a:p>
             <a:pPr algn="ctr" rtl="1"/>
             <a:r>
-              <a:rPr lang="en-US" sz="1400" dirty="0" smtClean="0">
+              <a:rPr lang="en-US" sz="1400" dirty="0">
                 <a:cs typeface="B Titr" panose="00000700000000000000" pitchFamily="2" charset="-78"/>
               </a:rPr>
               <a:t>Microprocessors and Assembly Language, Fall 2024, AUT, Tehran, Iran </a:t>
             </a:r>
-            <a:endParaRPr lang="en-US" sz="1400" dirty="0">
-              <a:cs typeface="B Titr" panose="00000700000000000000" pitchFamily="2" charset="-78"/>
-            </a:endParaRPr>
           </a:p>
         </p:txBody>
       </p:sp>
@@ -8372,21 +8097,6 @@
   <p:clrMapOvr>
     <a:masterClrMapping/>
   </p:clrMapOvr>
-  <mc:AlternateContent xmlns:mc="http://schemas.openxmlformats.org/markup-compatibility/2006" xmlns:p14="http://schemas.microsoft.com/office/powerpoint/2010/main">
-    <mc:Choice Requires="p14">
-      <p:transition spd="slow" p14:dur="2000"/>
-    </mc:Choice>
-    <mc:Fallback xmlns="">
-      <p:transition spd="slow"/>
-    </mc:Fallback>
-  </mc:AlternateContent>
-  <p:timing>
-    <p:tnLst>
-      <p:par>
-        <p:cTn id="1" dur="indefinite" restart="never" nodeType="tmRoot"/>
-      </p:par>
-    </p:tnLst>
-  </p:timing>
 </p:sld>
 </file>
 
@@ -8396,7 +8106,7 @@
     <p:bg>
       <p:bgPr>
         <a:blipFill dpi="0" rotWithShape="1">
-          <a:blip r:embed="rId14">
+          <a:blip r:embed="rId4">
             <a:lum/>
           </a:blip>
           <a:srcRect/>
@@ -8478,14 +8188,11 @@
           <a:p>
             <a:pPr algn="ctr" rtl="1"/>
             <a:r>
-              <a:rPr lang="en-US" sz="1400" dirty="0" smtClean="0">
+              <a:rPr lang="en-US" sz="1400" dirty="0">
                 <a:cs typeface="B Titr" panose="00000700000000000000" pitchFamily="2" charset="-78"/>
               </a:rPr>
               <a:t>Microprocessors and Assembly Language, Fall 2024, AUT, Tehran, Iran </a:t>
             </a:r>
-            <a:endParaRPr lang="en-US" sz="1400" dirty="0">
-              <a:cs typeface="B Titr" panose="00000700000000000000" pitchFamily="2" charset="-78"/>
-            </a:endParaRPr>
           </a:p>
         </p:txBody>
       </p:sp>
@@ -8517,18 +8224,10 @@
               </a:lnSpc>
             </a:pPr>
             <a:r>
-              <a:rPr lang="en-US" sz="3600" b="1" dirty="0" smtClean="0"/>
-              <a:t>Pulse </a:t>
-            </a:r>
-            <a:r>
               <a:rPr lang="en-US" sz="3600" b="1" dirty="0"/>
-              <a:t>Width </a:t>
-            </a:r>
-            <a:r>
-              <a:rPr lang="en-US" sz="3600" b="1" dirty="0" smtClean="0"/>
-              <a:t>Modulation (PWM)</a:t>
-            </a:r>
-            <a:endParaRPr lang="en-US" sz="3600" b="1" baseline="30000" dirty="0" smtClean="0"/>
+              <a:t>Pulse Width Modulation (PWM)</a:t>
+            </a:r>
+            <a:endParaRPr lang="en-US" sz="3600" b="1" baseline="30000" dirty="0"/>
           </a:p>
         </p:txBody>
       </p:sp>
@@ -8571,171 +8270,6 @@
           </a:p>
         </p:txBody>
       </p:sp>
-      <p:pic>
-        <p:nvPicPr>
-          <p:cNvPr id="4" name="ice.wmv">
-            <a:hlinkClick r:id="" action="ppaction://media"/>
-          </p:cNvPr>
-          <p:cNvPicPr>
-            <a:picLocks noChangeAspect="1"/>
-          </p:cNvPicPr>
-          <p:nvPr>
-            <a:videoFile r:link="rId4"/>
-            <p:extLst>
-              <p:ext uri="{DAA4B4D4-6D71-4841-9C94-3DE7FCFB9230}">
-                <p14:media xmlns:p14="http://schemas.microsoft.com/office/powerpoint/2010/main" r:embed="rId3"/>
-              </p:ext>
-            </p:extLst>
-          </p:nvPr>
-        </p:nvPicPr>
-        <p:blipFill>
-          <a:blip r:embed="rId15"/>
-          <a:stretch>
-            <a:fillRect/>
-          </a:stretch>
-        </p:blipFill>
-        <p:spPr>
-          <a:xfrm>
-            <a:off x="4972050" y="0"/>
-            <a:ext cx="4171950" cy="2571750"/>
-          </a:xfrm>
-          <a:prstGeom prst="rect">
-            <a:avLst/>
-          </a:prstGeom>
-        </p:spPr>
-      </p:pic>
-      <p:pic>
-        <p:nvPicPr>
-          <p:cNvPr id="5" name="sort.wmv">
-            <a:hlinkClick r:id="" action="ppaction://media"/>
-          </p:cNvPr>
-          <p:cNvPicPr>
-            <a:picLocks noChangeAspect="1"/>
-          </p:cNvPicPr>
-          <p:nvPr>
-            <a:videoFile r:link="rId6"/>
-            <p:extLst>
-              <p:ext uri="{DAA4B4D4-6D71-4841-9C94-3DE7FCFB9230}">
-                <p14:media xmlns:p14="http://schemas.microsoft.com/office/powerpoint/2010/main" r:embed="rId5"/>
-              </p:ext>
-            </p:extLst>
-          </p:nvPr>
-        </p:nvPicPr>
-        <p:blipFill>
-          <a:blip r:embed="rId16"/>
-          <a:stretch>
-            <a:fillRect/>
-          </a:stretch>
-        </p:blipFill>
-        <p:spPr>
-          <a:xfrm>
-            <a:off x="0" y="0"/>
-            <a:ext cx="4286250" cy="2400300"/>
-          </a:xfrm>
-          <a:prstGeom prst="rect">
-            <a:avLst/>
-          </a:prstGeom>
-        </p:spPr>
-      </p:pic>
-      <p:pic>
-        <p:nvPicPr>
-          <p:cNvPr id="13" name="BD.wmv">
-            <a:hlinkClick r:id="" action="ppaction://media"/>
-          </p:cNvPr>
-          <p:cNvPicPr>
-            <a:picLocks noChangeAspect="1"/>
-          </p:cNvPicPr>
-          <p:nvPr>
-            <a:videoFile r:link="rId8"/>
-            <p:extLst>
-              <p:ext uri="{DAA4B4D4-6D71-4841-9C94-3DE7FCFB9230}">
-                <p14:media xmlns:p14="http://schemas.microsoft.com/office/powerpoint/2010/main" r:embed="rId7"/>
-              </p:ext>
-            </p:extLst>
-          </p:nvPr>
-        </p:nvPicPr>
-        <p:blipFill>
-          <a:blip r:embed="rId17"/>
-          <a:stretch>
-            <a:fillRect/>
-          </a:stretch>
-        </p:blipFill>
-        <p:spPr>
-          <a:xfrm>
-            <a:off x="0" y="3666084"/>
-            <a:ext cx="5688563" cy="3191916"/>
-          </a:xfrm>
-          <a:prstGeom prst="rect">
-            <a:avLst/>
-          </a:prstGeom>
-        </p:spPr>
-      </p:pic>
-      <p:pic>
-        <p:nvPicPr>
-          <p:cNvPr id="14" name="bol.wmv">
-            <a:hlinkClick r:id="" action="ppaction://media"/>
-          </p:cNvPr>
-          <p:cNvPicPr>
-            <a:picLocks noChangeAspect="1"/>
-          </p:cNvPicPr>
-          <p:nvPr>
-            <a:videoFile r:link="rId10"/>
-            <p:extLst>
-              <p:ext uri="{DAA4B4D4-6D71-4841-9C94-3DE7FCFB9230}">
-                <p14:media xmlns:p14="http://schemas.microsoft.com/office/powerpoint/2010/main" r:embed="rId9"/>
-              </p:ext>
-            </p:extLst>
-          </p:nvPr>
-        </p:nvPicPr>
-        <p:blipFill>
-          <a:blip r:embed="rId18"/>
-          <a:stretch>
-            <a:fillRect/>
-          </a:stretch>
-        </p:blipFill>
-        <p:spPr>
-          <a:xfrm>
-            <a:off x="5942558" y="3666083"/>
-            <a:ext cx="3201441" cy="3201441"/>
-          </a:xfrm>
-          <a:prstGeom prst="rect">
-            <a:avLst/>
-          </a:prstGeom>
-        </p:spPr>
-      </p:pic>
-      <p:pic>
-        <p:nvPicPr>
-          <p:cNvPr id="15" name="ppl.wmv">
-            <a:hlinkClick r:id="" action="ppaction://media"/>
-          </p:cNvPr>
-          <p:cNvPicPr>
-            <a:picLocks noChangeAspect="1"/>
-          </p:cNvPicPr>
-          <p:nvPr>
-            <a:videoFile r:link="rId12"/>
-            <p:extLst>
-              <p:ext uri="{DAA4B4D4-6D71-4841-9C94-3DE7FCFB9230}">
-                <p14:media xmlns:p14="http://schemas.microsoft.com/office/powerpoint/2010/main" r:embed="rId11"/>
-              </p:ext>
-            </p:extLst>
-          </p:nvPr>
-        </p:nvPicPr>
-        <p:blipFill>
-          <a:blip r:embed="rId19"/>
-          <a:stretch>
-            <a:fillRect/>
-          </a:stretch>
-        </p:blipFill>
-        <p:spPr>
-          <a:xfrm>
-            <a:off x="3048000" y="658091"/>
-            <a:ext cx="3124200" cy="5680364"/>
-          </a:xfrm>
-          <a:prstGeom prst="rect">
-            <a:avLst/>
-          </a:prstGeom>
-        </p:spPr>
-      </p:pic>
     </p:spTree>
     <p:custDataLst>
       <p:tags r:id="rId2"/>
@@ -8749,461 +8283,6 @@
   <p:clrMapOvr>
     <a:overrideClrMapping bg1="lt1" tx1="dk1" bg2="lt2" tx2="dk2" accent1="accent1" accent2="accent2" accent3="accent3" accent4="accent4" accent5="accent5" accent6="accent6" hlink="hlink" folHlink="folHlink"/>
   </p:clrMapOvr>
-  <mc:AlternateContent xmlns:mc="http://schemas.openxmlformats.org/markup-compatibility/2006" xmlns:p14="http://schemas.microsoft.com/office/powerpoint/2010/main">
-    <mc:Choice Requires="p14">
-      <p:transition spd="slow" p14:dur="2000"/>
-    </mc:Choice>
-    <mc:Fallback xmlns="">
-      <p:transition spd="slow"/>
-    </mc:Fallback>
-  </mc:AlternateContent>
-  <p:timing>
-    <p:tnLst>
-      <p:par>
-        <p:cTn id="1" dur="indefinite" restart="never" nodeType="tmRoot">
-          <p:childTnLst>
-            <p:seq concurrent="1" nextAc="seek">
-              <p:cTn id="2" dur="indefinite" nodeType="mainSeq">
-                <p:childTnLst>
-                  <p:par>
-                    <p:cTn id="3" fill="hold">
-                      <p:stCondLst>
-                        <p:cond delay="indefinite"/>
-                        <p:cond evt="onBegin" delay="0">
-                          <p:tn val="2"/>
-                        </p:cond>
-                      </p:stCondLst>
-                      <p:childTnLst>
-                        <p:par>
-                          <p:cTn id="4" fill="hold">
-                            <p:stCondLst>
-                              <p:cond delay="0"/>
-                            </p:stCondLst>
-                            <p:childTnLst>
-                              <p:par>
-                                <p:cTn id="5" presetID="1" presetClass="mediacall" presetSubtype="0" fill="hold" nodeType="afterEffect">
-                                  <p:stCondLst>
-                                    <p:cond delay="0"/>
-                                  </p:stCondLst>
-                                  <p:childTnLst>
-                                    <p:cmd type="call" cmd="playFrom(0.0)">
-                                      <p:cBhvr>
-                                        <p:cTn id="6" dur="9957" fill="hold"/>
-                                        <p:tgtEl>
-                                          <p:spTgt spid="14"/>
-                                        </p:tgtEl>
-                                      </p:cBhvr>
-                                    </p:cmd>
-                                  </p:childTnLst>
-                                </p:cTn>
-                              </p:par>
-                              <p:par>
-                                <p:cTn id="7" presetID="1" presetClass="mediacall" presetSubtype="0" fill="hold" nodeType="withEffect">
-                                  <p:stCondLst>
-                                    <p:cond delay="0"/>
-                                  </p:stCondLst>
-                                  <p:childTnLst>
-                                    <p:cmd type="call" cmd="playFrom(0.0)">
-                                      <p:cBhvr>
-                                        <p:cTn id="8" dur="11166" fill="hold"/>
-                                        <p:tgtEl>
-                                          <p:spTgt spid="13"/>
-                                        </p:tgtEl>
-                                      </p:cBhvr>
-                                    </p:cmd>
-                                  </p:childTnLst>
-                                </p:cTn>
-                              </p:par>
-                              <p:par>
-                                <p:cTn id="9" presetID="1" presetClass="mediacall" presetSubtype="0" fill="hold" nodeType="withEffect">
-                                  <p:stCondLst>
-                                    <p:cond delay="0"/>
-                                  </p:stCondLst>
-                                  <p:childTnLst>
-                                    <p:cmd type="call" cmd="playFrom(0.0)">
-                                      <p:cBhvr>
-                                        <p:cTn id="10" dur="624" fill="hold"/>
-                                        <p:tgtEl>
-                                          <p:spTgt spid="4"/>
-                                        </p:tgtEl>
-                                      </p:cBhvr>
-                                    </p:cmd>
-                                  </p:childTnLst>
-                                </p:cTn>
-                              </p:par>
-                              <p:par>
-                                <p:cTn id="11" presetID="1" presetClass="mediacall" presetSubtype="0" fill="hold" nodeType="withEffect">
-                                  <p:stCondLst>
-                                    <p:cond delay="0"/>
-                                  </p:stCondLst>
-                                  <p:childTnLst>
-                                    <p:cmd type="call" cmd="playFrom(0.0)">
-                                      <p:cBhvr>
-                                        <p:cTn id="12" dur="11874" fill="hold"/>
-                                        <p:tgtEl>
-                                          <p:spTgt spid="5"/>
-                                        </p:tgtEl>
-                                      </p:cBhvr>
-                                    </p:cmd>
-                                  </p:childTnLst>
-                                </p:cTn>
-                              </p:par>
-                            </p:childTnLst>
-                          </p:cTn>
-                        </p:par>
-                      </p:childTnLst>
-                    </p:cTn>
-                  </p:par>
-                  <p:par>
-                    <p:cTn id="13" fill="hold">
-                      <p:stCondLst>
-                        <p:cond delay="indefinite"/>
-                      </p:stCondLst>
-                      <p:childTnLst>
-                        <p:par>
-                          <p:cTn id="14" fill="hold">
-                            <p:stCondLst>
-                              <p:cond delay="0"/>
-                            </p:stCondLst>
-                            <p:childTnLst>
-                              <p:par>
-                                <p:cTn id="15" presetID="1" presetClass="mediacall" presetSubtype="0" fill="hold" nodeType="clickEffect">
-                                  <p:stCondLst>
-                                    <p:cond delay="0"/>
-                                  </p:stCondLst>
-                                  <p:childTnLst>
-                                    <p:cmd type="call" cmd="playFrom(0.0)">
-                                      <p:cBhvr>
-                                        <p:cTn id="16" dur="14916" fill="hold"/>
-                                        <p:tgtEl>
-                                          <p:spTgt spid="15"/>
-                                        </p:tgtEl>
-                                      </p:cBhvr>
-                                    </p:cmd>
-                                  </p:childTnLst>
-                                </p:cTn>
-                              </p:par>
-                            </p:childTnLst>
-                          </p:cTn>
-                        </p:par>
-                      </p:childTnLst>
-                    </p:cTn>
-                  </p:par>
-                </p:childTnLst>
-              </p:cTn>
-              <p:prevCondLst>
-                <p:cond evt="onPrev" delay="0">
-                  <p:tgtEl>
-                    <p:sldTgt/>
-                  </p:tgtEl>
-                </p:cond>
-              </p:prevCondLst>
-              <p:nextCondLst>
-                <p:cond evt="onNext" delay="0">
-                  <p:tgtEl>
-                    <p:sldTgt/>
-                  </p:tgtEl>
-                </p:cond>
-              </p:nextCondLst>
-            </p:seq>
-            <p:video>
-              <p:cMediaNode vol="80000">
-                <p:cTn id="17" repeatCount="indefinite" fill="hold" display="0">
-                  <p:stCondLst>
-                    <p:cond delay="indefinite"/>
-                  </p:stCondLst>
-                </p:cTn>
-                <p:tgtEl>
-                  <p:spTgt spid="14"/>
-                </p:tgtEl>
-              </p:cMediaNode>
-            </p:video>
-            <p:seq concurrent="1" nextAc="seek">
-              <p:cTn id="18" restart="whenNotActive" fill="hold" evtFilter="cancelBubble" nodeType="interactiveSeq">
-                <p:stCondLst>
-                  <p:cond evt="onClick" delay="0">
-                    <p:tgtEl>
-                      <p:spTgt spid="14"/>
-                    </p:tgtEl>
-                  </p:cond>
-                </p:stCondLst>
-                <p:endSync evt="end" delay="0">
-                  <p:rtn val="all"/>
-                </p:endSync>
-                <p:childTnLst>
-                  <p:par>
-                    <p:cTn id="19" fill="hold">
-                      <p:stCondLst>
-                        <p:cond delay="0"/>
-                      </p:stCondLst>
-                      <p:childTnLst>
-                        <p:par>
-                          <p:cTn id="20" fill="hold">
-                            <p:stCondLst>
-                              <p:cond delay="0"/>
-                            </p:stCondLst>
-                            <p:childTnLst>
-                              <p:par>
-                                <p:cTn id="21" presetID="2" presetClass="mediacall" presetSubtype="0" fill="hold" nodeType="clickEffect">
-                                  <p:stCondLst>
-                                    <p:cond delay="0"/>
-                                  </p:stCondLst>
-                                  <p:childTnLst>
-                                    <p:cmd type="call" cmd="togglePause">
-                                      <p:cBhvr>
-                                        <p:cTn id="22" dur="1" fill="hold"/>
-                                        <p:tgtEl>
-                                          <p:spTgt spid="14"/>
-                                        </p:tgtEl>
-                                      </p:cBhvr>
-                                    </p:cmd>
-                                  </p:childTnLst>
-                                </p:cTn>
-                              </p:par>
-                            </p:childTnLst>
-                          </p:cTn>
-                        </p:par>
-                      </p:childTnLst>
-                    </p:cTn>
-                  </p:par>
-                </p:childTnLst>
-              </p:cTn>
-              <p:nextCondLst>
-                <p:cond evt="onClick" delay="0">
-                  <p:tgtEl>
-                    <p:spTgt spid="14"/>
-                  </p:tgtEl>
-                </p:cond>
-              </p:nextCondLst>
-            </p:seq>
-            <p:video>
-              <p:cMediaNode vol="80000">
-                <p:cTn id="23" repeatCount="indefinite" fill="hold" display="0">
-                  <p:stCondLst>
-                    <p:cond delay="indefinite"/>
-                  </p:stCondLst>
-                </p:cTn>
-                <p:tgtEl>
-                  <p:spTgt spid="13"/>
-                </p:tgtEl>
-              </p:cMediaNode>
-            </p:video>
-            <p:seq concurrent="1" nextAc="seek">
-              <p:cTn id="24" restart="whenNotActive" fill="hold" evtFilter="cancelBubble" nodeType="interactiveSeq">
-                <p:stCondLst>
-                  <p:cond evt="onClick" delay="0">
-                    <p:tgtEl>
-                      <p:spTgt spid="13"/>
-                    </p:tgtEl>
-                  </p:cond>
-                </p:stCondLst>
-                <p:endSync evt="end" delay="0">
-                  <p:rtn val="all"/>
-                </p:endSync>
-                <p:childTnLst>
-                  <p:par>
-                    <p:cTn id="25" fill="hold">
-                      <p:stCondLst>
-                        <p:cond delay="0"/>
-                      </p:stCondLst>
-                      <p:childTnLst>
-                        <p:par>
-                          <p:cTn id="26" fill="hold">
-                            <p:stCondLst>
-                              <p:cond delay="0"/>
-                            </p:stCondLst>
-                            <p:childTnLst>
-                              <p:par>
-                                <p:cTn id="27" presetID="2" presetClass="mediacall" presetSubtype="0" fill="hold" nodeType="clickEffect">
-                                  <p:stCondLst>
-                                    <p:cond delay="0"/>
-                                  </p:stCondLst>
-                                  <p:childTnLst>
-                                    <p:cmd type="call" cmd="togglePause">
-                                      <p:cBhvr>
-                                        <p:cTn id="28" dur="1" fill="hold"/>
-                                        <p:tgtEl>
-                                          <p:spTgt spid="13"/>
-                                        </p:tgtEl>
-                                      </p:cBhvr>
-                                    </p:cmd>
-                                  </p:childTnLst>
-                                </p:cTn>
-                              </p:par>
-                            </p:childTnLst>
-                          </p:cTn>
-                        </p:par>
-                      </p:childTnLst>
-                    </p:cTn>
-                  </p:par>
-                </p:childTnLst>
-              </p:cTn>
-              <p:nextCondLst>
-                <p:cond evt="onClick" delay="0">
-                  <p:tgtEl>
-                    <p:spTgt spid="13"/>
-                  </p:tgtEl>
-                </p:cond>
-              </p:nextCondLst>
-            </p:seq>
-            <p:video>
-              <p:cMediaNode vol="80000">
-                <p:cTn id="29" repeatCount="indefinite" fill="hold" display="0">
-                  <p:stCondLst>
-                    <p:cond delay="indefinite"/>
-                  </p:stCondLst>
-                </p:cTn>
-                <p:tgtEl>
-                  <p:spTgt spid="4"/>
-                </p:tgtEl>
-              </p:cMediaNode>
-            </p:video>
-            <p:seq concurrent="1" nextAc="seek">
-              <p:cTn id="30" restart="whenNotActive" fill="hold" evtFilter="cancelBubble" nodeType="interactiveSeq">
-                <p:stCondLst>
-                  <p:cond evt="onClick" delay="0">
-                    <p:tgtEl>
-                      <p:spTgt spid="4"/>
-                    </p:tgtEl>
-                  </p:cond>
-                </p:stCondLst>
-                <p:endSync evt="end" delay="0">
-                  <p:rtn val="all"/>
-                </p:endSync>
-                <p:childTnLst>
-                  <p:par>
-                    <p:cTn id="31" fill="hold">
-                      <p:stCondLst>
-                        <p:cond delay="0"/>
-                      </p:stCondLst>
-                      <p:childTnLst>
-                        <p:par>
-                          <p:cTn id="32" fill="hold">
-                            <p:stCondLst>
-                              <p:cond delay="0"/>
-                            </p:stCondLst>
-                            <p:childTnLst>
-                              <p:par>
-                                <p:cTn id="33" presetID="2" presetClass="mediacall" presetSubtype="0" fill="hold" nodeType="clickEffect">
-                                  <p:stCondLst>
-                                    <p:cond delay="0"/>
-                                  </p:stCondLst>
-                                  <p:childTnLst>
-                                    <p:cmd type="call" cmd="togglePause">
-                                      <p:cBhvr>
-                                        <p:cTn id="34" dur="1" fill="hold"/>
-                                        <p:tgtEl>
-                                          <p:spTgt spid="4"/>
-                                        </p:tgtEl>
-                                      </p:cBhvr>
-                                    </p:cmd>
-                                  </p:childTnLst>
-                                </p:cTn>
-                              </p:par>
-                            </p:childTnLst>
-                          </p:cTn>
-                        </p:par>
-                      </p:childTnLst>
-                    </p:cTn>
-                  </p:par>
-                </p:childTnLst>
-              </p:cTn>
-              <p:nextCondLst>
-                <p:cond evt="onClick" delay="0">
-                  <p:tgtEl>
-                    <p:spTgt spid="4"/>
-                  </p:tgtEl>
-                </p:cond>
-              </p:nextCondLst>
-            </p:seq>
-            <p:video>
-              <p:cMediaNode vol="80000">
-                <p:cTn id="35" repeatCount="indefinite" fill="hold" display="0">
-                  <p:stCondLst>
-                    <p:cond delay="indefinite"/>
-                  </p:stCondLst>
-                </p:cTn>
-                <p:tgtEl>
-                  <p:spTgt spid="5"/>
-                </p:tgtEl>
-              </p:cMediaNode>
-            </p:video>
-            <p:seq concurrent="1" nextAc="seek">
-              <p:cTn id="36" restart="whenNotActive" fill="hold" evtFilter="cancelBubble" nodeType="interactiveSeq">
-                <p:stCondLst>
-                  <p:cond evt="onClick" delay="0">
-                    <p:tgtEl>
-                      <p:spTgt spid="5"/>
-                    </p:tgtEl>
-                  </p:cond>
-                </p:stCondLst>
-                <p:endSync evt="end" delay="0">
-                  <p:rtn val="all"/>
-                </p:endSync>
-                <p:childTnLst>
-                  <p:par>
-                    <p:cTn id="37" fill="hold">
-                      <p:stCondLst>
-                        <p:cond delay="0"/>
-                      </p:stCondLst>
-                      <p:childTnLst>
-                        <p:par>
-                          <p:cTn id="38" fill="hold">
-                            <p:stCondLst>
-                              <p:cond delay="0"/>
-                            </p:stCondLst>
-                            <p:childTnLst>
-                              <p:par>
-                                <p:cTn id="39" presetID="2" presetClass="mediacall" presetSubtype="0" fill="hold" nodeType="clickEffect">
-                                  <p:stCondLst>
-                                    <p:cond delay="0"/>
-                                  </p:stCondLst>
-                                  <p:childTnLst>
-                                    <p:cmd type="call" cmd="togglePause">
-                                      <p:cBhvr>
-                                        <p:cTn id="40" dur="1" fill="hold"/>
-                                        <p:tgtEl>
-                                          <p:spTgt spid="5"/>
-                                        </p:tgtEl>
-                                      </p:cBhvr>
-                                    </p:cmd>
-                                  </p:childTnLst>
-                                </p:cTn>
-                              </p:par>
-                            </p:childTnLst>
-                          </p:cTn>
-                        </p:par>
-                      </p:childTnLst>
-                    </p:cTn>
-                  </p:par>
-                </p:childTnLst>
-              </p:cTn>
-              <p:nextCondLst>
-                <p:cond evt="onClick" delay="0">
-                  <p:tgtEl>
-                    <p:spTgt spid="5"/>
-                  </p:tgtEl>
-                </p:cond>
-              </p:nextCondLst>
-            </p:seq>
-            <p:video>
-              <p:cMediaNode vol="80000" showWhenStopped="0">
-                <p:cTn id="41" repeatCount="indefinite" fill="hold" display="0">
-                  <p:stCondLst>
-                    <p:cond delay="indefinite"/>
-                  </p:stCondLst>
-                </p:cTn>
-                <p:tgtEl>
-                  <p:spTgt spid="15"/>
-                </p:tgtEl>
-              </p:cMediaNode>
-            </p:video>
-          </p:childTnLst>
-        </p:cTn>
-      </p:par>
-    </p:tnLst>
-  </p:timing>
-  <p:extLst mod="1"/>
 </p:sld>
 </file>
 
@@ -9256,18 +8335,11 @@
           <a:lstStyle/>
           <a:p>
             <a:r>
-              <a:rPr lang="en-US" sz="3200" dirty="0" smtClean="0">
-                <a:latin typeface="+mj-lt"/>
-                <a:cs typeface="B Titr" panose="00000700000000000000" pitchFamily="2" charset="-78"/>
-              </a:rPr>
-              <a:t>PWM: What </a:t>
-            </a:r>
-            <a:r>
               <a:rPr lang="en-US" sz="3200" dirty="0">
                 <a:latin typeface="+mj-lt"/>
                 <a:cs typeface="B Titr" panose="00000700000000000000" pitchFamily="2" charset="-78"/>
               </a:rPr>
-              <a:t>is it and how does it work?</a:t>
+              <a:t>PWM: What is it and how does it work?</a:t>
             </a:r>
           </a:p>
         </p:txBody>
@@ -9329,14 +8401,11 @@
           <a:p>
             <a:pPr algn="ctr" rtl="1"/>
             <a:r>
-              <a:rPr lang="en-US" sz="1400" dirty="0" smtClean="0">
+              <a:rPr lang="en-US" sz="1400" dirty="0">
                 <a:cs typeface="B Titr" panose="00000700000000000000" pitchFamily="2" charset="-78"/>
               </a:rPr>
               <a:t>Microprocessors and Assembly Language, Fall 2024, AUT, Tehran, Iran </a:t>
             </a:r>
-            <a:endParaRPr lang="en-US" sz="1400" dirty="0">
-              <a:cs typeface="B Titr" panose="00000700000000000000" pitchFamily="2" charset="-78"/>
-            </a:endParaRPr>
           </a:p>
         </p:txBody>
       </p:sp>
@@ -9367,21 +8436,13 @@
                 <a:spcPct val="150000"/>
               </a:lnSpc>
             </a:pPr>
-            <a:r>
-              <a:rPr lang="en-US" sz="2000" dirty="0"/>
-              <a:t/>
-            </a:r>
             <a:br>
               <a:rPr lang="en-US" sz="2000" dirty="0"/>
             </a:br>
-            <a:r>
-              <a:rPr lang="en-US" sz="2000" dirty="0"/>
-              <a:t/>
-            </a:r>
             <a:br>
               <a:rPr lang="en-US" sz="2000" dirty="0"/>
             </a:br>
-            <a:endParaRPr lang="en-US" sz="2000" b="1" dirty="0" smtClean="0">
+            <a:endParaRPr lang="en-US" sz="2000" b="1" dirty="0">
               <a:solidFill>
                 <a:srgbClr val="00B050"/>
               </a:solidFill>
@@ -9420,11 +8481,7 @@
             </a:pPr>
             <a:r>
               <a:rPr lang="en-US" sz="2000" b="1" dirty="0"/>
-              <a:t>Digital signals have two </a:t>
-            </a:r>
-            <a:r>
-              <a:rPr lang="en-US" sz="2000" b="1" dirty="0" smtClean="0"/>
-              <a:t>positions</a:t>
+              <a:t>Digital signals have two positions</a:t>
             </a:r>
           </a:p>
           <a:p>
@@ -9436,14 +8493,9 @@
               <a:buChar char="•"/>
             </a:pPr>
             <a:r>
-              <a:rPr lang="en-US" b="1" dirty="0" smtClean="0"/>
-              <a:t>on </a:t>
-            </a:r>
-            <a:r>
               <a:rPr lang="en-US" b="1" dirty="0"/>
-              <a:t>or off, interpreted in shorthand as 1 or 0</a:t>
-            </a:r>
-            <a:endParaRPr lang="en-US" b="1" dirty="0" smtClean="0"/>
+              <a:t>on or off, interpreted in shorthand as 1 or 0</a:t>
+            </a:r>
           </a:p>
           <a:p>
             <a:pPr marL="342900" indent="-342900">
@@ -9455,17 +8507,8 @@
             </a:pPr>
             <a:r>
               <a:rPr lang="en-US" sz="2000" b="1" dirty="0"/>
-              <a:t>Analog </a:t>
-            </a:r>
-            <a:r>
-              <a:rPr lang="en-US" sz="2000" b="1" dirty="0" smtClean="0"/>
-              <a:t>signals </a:t>
-            </a:r>
-            <a:r>
-              <a:rPr lang="en-US" sz="2000" b="1" dirty="0"/>
-              <a:t>can be </a:t>
-            </a:r>
-            <a:endParaRPr lang="en-US" sz="2000" b="1" dirty="0" smtClean="0"/>
+              <a:t>Analog signals can be </a:t>
+            </a:r>
           </a:p>
           <a:p>
             <a:pPr marL="800100" lvl="1" indent="-342900">
@@ -9476,16 +8519,8 @@
               <a:buChar char="•"/>
             </a:pPr>
             <a:r>
-              <a:rPr lang="en-US" b="1" dirty="0" smtClean="0"/>
-              <a:t>on</a:t>
-            </a:r>
-            <a:r>
               <a:rPr lang="en-US" b="1" dirty="0"/>
-              <a:t>, off, half-way, two-thirds the way to on, and an infinite number of positions between 0 and </a:t>
-            </a:r>
-            <a:r>
-              <a:rPr lang="en-US" b="1" dirty="0" smtClean="0"/>
-              <a:t>1</a:t>
+              <a:t>on, off, half-way, two-thirds the way to on, and an infinite number of positions between 0 and 1</a:t>
             </a:r>
           </a:p>
           <a:p>
@@ -9497,24 +8532,8 @@
               <a:buChar char="•"/>
             </a:pPr>
             <a:r>
-              <a:rPr lang="en-US" sz="2000" b="1" dirty="0" smtClean="0"/>
-              <a:t>To </a:t>
-            </a:r>
-            <a:r>
               <a:rPr lang="en-US" sz="2000" b="1" dirty="0"/>
-              <a:t>take an </a:t>
-            </a:r>
-            <a:r>
-              <a:rPr lang="en-US" sz="2000" b="1" dirty="0" smtClean="0"/>
-              <a:t>analog </a:t>
-            </a:r>
-            <a:r>
-              <a:rPr lang="en-US" sz="2000" b="1" dirty="0"/>
-              <a:t>input signal (e.g., temperature) into a </a:t>
-            </a:r>
-            <a:r>
-              <a:rPr lang="en-US" sz="2000" b="1" dirty="0" smtClean="0"/>
-              <a:t>microcontroller</a:t>
+              <a:t>To take an analog input signal (e.g., temperature) into a microcontroller</a:t>
             </a:r>
           </a:p>
           <a:p>
@@ -9526,16 +8545,8 @@
               <a:buChar char="•"/>
             </a:pPr>
             <a:r>
-              <a:rPr lang="en-US" sz="2000" b="1" dirty="0" smtClean="0"/>
-              <a:t>by </a:t>
-            </a:r>
-            <a:r>
               <a:rPr lang="en-US" sz="2000" b="1" dirty="0"/>
-              <a:t>using an analog-to-digital </a:t>
-            </a:r>
-            <a:r>
-              <a:rPr lang="en-US" sz="2000" b="1" dirty="0" smtClean="0"/>
-              <a:t>converter</a:t>
+              <a:t>by using an analog-to-digital converter</a:t>
             </a:r>
           </a:p>
           <a:p>
@@ -9547,16 +8558,8 @@
               <a:buChar char="•"/>
             </a:pPr>
             <a:r>
-              <a:rPr lang="en-US" sz="2000" b="1" dirty="0" smtClean="0"/>
-              <a:t>But </a:t>
-            </a:r>
-            <a:r>
               <a:rPr lang="en-US" sz="2000" b="1" dirty="0"/>
-              <a:t>what about </a:t>
-            </a:r>
-            <a:r>
-              <a:rPr lang="en-US" sz="2000" b="1" dirty="0" smtClean="0"/>
-              <a:t>outputs?</a:t>
+              <a:t>But what about outputs?</a:t>
             </a:r>
           </a:p>
           <a:p>
@@ -9568,16 +8571,8 @@
               <a:buChar char="•"/>
             </a:pPr>
             <a:r>
-              <a:rPr lang="en-US" sz="2000" b="1" dirty="0" smtClean="0"/>
-              <a:t>PWM </a:t>
-            </a:r>
-            <a:r>
               <a:rPr lang="en-US" sz="2000" b="1" dirty="0"/>
-              <a:t>is a way to control analog devices with a digital </a:t>
-            </a:r>
-            <a:r>
-              <a:rPr lang="en-US" sz="2000" b="1" dirty="0" smtClean="0"/>
-              <a:t>output		</a:t>
+              <a:t>PWM is a way to control analog devices with a digital output		</a:t>
             </a:r>
           </a:p>
           <a:p>
@@ -9589,14 +8584,9 @@
               <a:buChar char="•"/>
             </a:pPr>
             <a:r>
-              <a:rPr lang="en-US" b="1" dirty="0" smtClean="0"/>
-              <a:t>Drive </a:t>
-            </a:r>
-            <a:r>
               <a:rPr lang="en-US" b="1" dirty="0"/>
-              <a:t>analog devices like variable-speed motors, dimmable lights, actuators, and speakers</a:t>
-            </a:r>
-            <a:endParaRPr lang="en-US" b="1" dirty="0" smtClean="0"/>
+              <a:t>Drive analog devices like variable-speed motors, dimmable lights, actuators, and speakers</a:t>
+            </a:r>
           </a:p>
         </p:txBody>
       </p:sp>
@@ -9644,14 +8634,6 @@
   <p:clrMapOvr>
     <a:overrideClrMapping bg1="lt1" tx1="dk1" bg2="lt2" tx2="dk2" accent1="accent1" accent2="accent2" accent3="accent3" accent4="accent4" accent5="accent5" accent6="accent6" hlink="hlink" folHlink="folHlink"/>
   </p:clrMapOvr>
-  <mc:AlternateContent xmlns:mc="http://schemas.openxmlformats.org/markup-compatibility/2006" xmlns:p14="http://schemas.microsoft.com/office/powerpoint/2010/main">
-    <mc:Choice Requires="p14">
-      <p:transition spd="slow" p14:dur="2000"/>
-    </mc:Choice>
-    <mc:Fallback xmlns="">
-      <p:transition spd="slow"/>
-    </mc:Fallback>
-  </mc:AlternateContent>
   <p:timing>
     <p:tnLst>
       <p:par>
@@ -10283,18 +9265,11 @@
           <a:lstStyle/>
           <a:p>
             <a:r>
-              <a:rPr lang="en-US" sz="3200" dirty="0" smtClean="0">
-                <a:latin typeface="+mj-lt"/>
-                <a:cs typeface="B Titr" panose="00000700000000000000" pitchFamily="2" charset="-78"/>
-              </a:rPr>
-              <a:t>PWM: What </a:t>
-            </a:r>
-            <a:r>
               <a:rPr lang="en-US" sz="3200" dirty="0">
                 <a:latin typeface="+mj-lt"/>
                 <a:cs typeface="B Titr" panose="00000700000000000000" pitchFamily="2" charset="-78"/>
               </a:rPr>
-              <a:t>is it and how does it work?</a:t>
+              <a:t>PWM: What is it and how does it work?</a:t>
             </a:r>
           </a:p>
         </p:txBody>
@@ -10356,14 +9331,11 @@
           <a:p>
             <a:pPr algn="ctr" rtl="1"/>
             <a:r>
-              <a:rPr lang="en-US" sz="1400" dirty="0" smtClean="0">
+              <a:rPr lang="en-US" sz="1400" dirty="0">
                 <a:cs typeface="B Titr" panose="00000700000000000000" pitchFamily="2" charset="-78"/>
               </a:rPr>
               <a:t>Microprocessors and Assembly Language, Fall 2024, AUT, Tehran, Iran </a:t>
             </a:r>
-            <a:endParaRPr lang="en-US" sz="1400" dirty="0">
-              <a:cs typeface="B Titr" panose="00000700000000000000" pitchFamily="2" charset="-78"/>
-            </a:endParaRPr>
           </a:p>
         </p:txBody>
       </p:sp>
@@ -10394,21 +9366,13 @@
                 <a:spcPct val="150000"/>
               </a:lnSpc>
             </a:pPr>
-            <a:r>
-              <a:rPr lang="en-US" sz="2000" dirty="0"/>
-              <a:t/>
-            </a:r>
             <a:br>
               <a:rPr lang="en-US" sz="2000" dirty="0"/>
             </a:br>
-            <a:r>
-              <a:rPr lang="en-US" sz="2000" dirty="0"/>
-              <a:t/>
-            </a:r>
             <a:br>
               <a:rPr lang="en-US" sz="2000" dirty="0"/>
             </a:br>
-            <a:endParaRPr lang="en-US" sz="2000" b="1" dirty="0" smtClean="0">
+            <a:endParaRPr lang="en-US" sz="2000" b="1" dirty="0">
               <a:solidFill>
                 <a:srgbClr val="00B050"/>
               </a:solidFill>
@@ -10449,7 +9413,6 @@
               <a:rPr lang="en-US" sz="2000" b="1" dirty="0"/>
               <a:t>PWM is not true analog output</a:t>
             </a:r>
-            <a:endParaRPr lang="en-US" sz="2000" b="1" dirty="0" smtClean="0"/>
           </a:p>
           <a:p>
             <a:pPr marL="800100" lvl="1" indent="-342900">
@@ -10461,11 +9424,7 @@
             </a:pPr>
             <a:r>
               <a:rPr lang="en-US" b="1" dirty="0"/>
-              <a:t>PWM “fakes” an analog-like result by applying power in pulses, or short bursts of regulated </a:t>
-            </a:r>
-            <a:r>
-              <a:rPr lang="en-US" b="1" dirty="0" smtClean="0"/>
-              <a:t>voltage</a:t>
+              <a:t>PWM “fakes” an analog-like result by applying power in pulses, or short bursts of regulated voltage</a:t>
             </a:r>
           </a:p>
           <a:p>
@@ -10477,14 +9436,9 @@
               <a:buChar char="•"/>
             </a:pPr>
             <a:r>
-              <a:rPr lang="en-US" b="1" dirty="0" smtClean="0"/>
-              <a:t>Is </a:t>
-            </a:r>
-            <a:r>
               <a:rPr lang="en-US" b="1" dirty="0"/>
-              <a:t>a fancy term for describing a type of digital signal</a:t>
-            </a:r>
-            <a:endParaRPr lang="en-US" b="1" dirty="0" smtClean="0"/>
+              <a:t>Is a fancy term for describing a type of digital signal</a:t>
+            </a:r>
           </a:p>
           <a:p>
             <a:pPr marL="800100" lvl="1" indent="-342900">
@@ -10494,7 +9448,7 @@
               <a:buFont typeface="Arial" panose="020B0604020202020204" pitchFamily="34" charset="0"/>
               <a:buChar char="•"/>
             </a:pPr>
-            <a:endParaRPr lang="en-US" b="1" dirty="0" smtClean="0"/>
+            <a:endParaRPr lang="en-US" b="1" dirty="0"/>
           </a:p>
         </p:txBody>
       </p:sp>
@@ -10583,14 +9537,6 @@
   <p:clrMapOvr>
     <a:overrideClrMapping bg1="lt1" tx1="dk1" bg2="lt2" tx2="dk2" accent1="accent1" accent2="accent2" accent3="accent3" accent4="accent4" accent5="accent5" accent6="accent6" hlink="hlink" folHlink="folHlink"/>
   </p:clrMapOvr>
-  <mc:AlternateContent xmlns:mc="http://schemas.openxmlformats.org/markup-compatibility/2006" xmlns:p14="http://schemas.microsoft.com/office/powerpoint/2010/main">
-    <mc:Choice Requires="p14">
-      <p:transition spd="slow" p14:dur="2000"/>
-    </mc:Choice>
-    <mc:Fallback xmlns="">
-      <p:transition spd="slow"/>
-    </mc:Fallback>
-  </mc:AlternateContent>
   <p:timing>
     <p:tnLst>
       <p:par>
@@ -10795,18 +9741,11 @@
           <a:lstStyle/>
           <a:p>
             <a:r>
-              <a:rPr lang="en-US" sz="3200" dirty="0" smtClean="0">
-                <a:latin typeface="+mj-lt"/>
-                <a:cs typeface="B Titr" panose="00000700000000000000" pitchFamily="2" charset="-78"/>
-              </a:rPr>
-              <a:t>PWM: What </a:t>
-            </a:r>
-            <a:r>
               <a:rPr lang="en-US" sz="3200" dirty="0">
                 <a:latin typeface="+mj-lt"/>
                 <a:cs typeface="B Titr" panose="00000700000000000000" pitchFamily="2" charset="-78"/>
               </a:rPr>
-              <a:t>is it and how does it work?</a:t>
+              <a:t>PWM: What is it and how does it work?</a:t>
             </a:r>
           </a:p>
         </p:txBody>
@@ -10868,14 +9807,11 @@
           <a:p>
             <a:pPr algn="ctr" rtl="1"/>
             <a:r>
-              <a:rPr lang="en-US" sz="1400" dirty="0" smtClean="0">
+              <a:rPr lang="en-US" sz="1400" dirty="0">
                 <a:cs typeface="B Titr" panose="00000700000000000000" pitchFamily="2" charset="-78"/>
               </a:rPr>
               <a:t>Microprocessors and Assembly Language, Fall 2024, AUT, Tehran, Iran </a:t>
             </a:r>
-            <a:endParaRPr lang="en-US" sz="1400" dirty="0">
-              <a:cs typeface="B Titr" panose="00000700000000000000" pitchFamily="2" charset="-78"/>
-            </a:endParaRPr>
           </a:p>
         </p:txBody>
       </p:sp>
@@ -10906,21 +9842,13 @@
                 <a:spcPct val="150000"/>
               </a:lnSpc>
             </a:pPr>
-            <a:r>
-              <a:rPr lang="en-US" sz="2000" dirty="0"/>
-              <a:t/>
-            </a:r>
             <a:br>
               <a:rPr lang="en-US" sz="2000" dirty="0"/>
             </a:br>
-            <a:r>
-              <a:rPr lang="en-US" sz="2000" dirty="0"/>
-              <a:t/>
-            </a:r>
             <a:br>
               <a:rPr lang="en-US" sz="2000" dirty="0"/>
             </a:br>
-            <a:endParaRPr lang="en-US" sz="2000" b="1" dirty="0" smtClean="0">
+            <a:endParaRPr lang="en-US" sz="2000" b="1" dirty="0">
               <a:solidFill>
                 <a:srgbClr val="00B050"/>
               </a:solidFill>
@@ -10958,16 +9886,8 @@
               <a:buChar char="•"/>
             </a:pPr>
             <a:r>
-              <a:rPr lang="en-US" b="1" dirty="0" smtClean="0"/>
-              <a:t>A </a:t>
-            </a:r>
-            <a:r>
               <a:rPr lang="en-US" b="1" dirty="0"/>
-              <a:t>device that is driven by PWM ends up behaving like the average of the </a:t>
-            </a:r>
-            <a:r>
-              <a:rPr lang="en-US" b="1" dirty="0" smtClean="0"/>
-              <a:t>pulses</a:t>
+              <a:t>A device that is driven by PWM ends up behaving like the average of the pulses</a:t>
             </a:r>
           </a:p>
           <a:p>
@@ -10980,19 +9900,7 @@
             </a:pPr>
             <a:r>
               <a:rPr lang="en-US" b="1" dirty="0"/>
-              <a:t>The </a:t>
-            </a:r>
-            <a:r>
-              <a:rPr lang="en-US" b="1" dirty="0" smtClean="0"/>
-              <a:t>average voltage level can be a steady voltage or a moving target (dynamic/changing over </a:t>
-            </a:r>
-            <a:r>
-              <a:rPr lang="en-US" b="1" dirty="0"/>
-              <a:t>time</a:t>
-            </a:r>
-            <a:r>
-              <a:rPr lang="en-US" b="1" dirty="0" smtClean="0"/>
-              <a:t>)</a:t>
+              <a:t>The average voltage level can be a steady voltage or a moving target (dynamic/changing over time)</a:t>
             </a:r>
           </a:p>
           <a:p>
@@ -11003,7 +9911,7 @@
               <a:buFont typeface="Arial" panose="020B0604020202020204" pitchFamily="34" charset="0"/>
               <a:buChar char="•"/>
             </a:pPr>
-            <a:endParaRPr lang="en-US" sz="2000" b="1" dirty="0" smtClean="0"/>
+            <a:endParaRPr lang="en-US" sz="2000" b="1" dirty="0"/>
           </a:p>
         </p:txBody>
       </p:sp>
@@ -11103,31 +10011,14 @@
             <a:pPr algn="ctr"/>
             <a:r>
               <a:rPr lang="en-US" b="1" dirty="0"/>
-              <a:t> Average </a:t>
-            </a:r>
-            <a:r>
-              <a:rPr lang="en-US" b="1" dirty="0" smtClean="0"/>
-              <a:t>Voltage = </a:t>
-            </a:r>
-            <a:endParaRPr lang="en-US" b="1" dirty="0"/>
+              <a:t> Average Voltage = </a:t>
+            </a:r>
           </a:p>
           <a:p>
             <a:pPr algn="ctr"/>
             <a:r>
-              <a:rPr lang="en-US" b="1" dirty="0" smtClean="0"/>
-              <a:t>Duty Cycle  </a:t>
-            </a:r>
-            <a:r>
               <a:rPr lang="en-US" b="1" dirty="0"/>
-              <a:t>x </a:t>
-            </a:r>
-            <a:r>
-              <a:rPr lang="en-US" b="1" dirty="0" smtClean="0"/>
-              <a:t> High </a:t>
-            </a:r>
-            <a:r>
-              <a:rPr lang="en-US" b="1" dirty="0"/>
-              <a:t>Voltage Level </a:t>
+              <a:t>Duty Cycle  x  High Voltage Level </a:t>
             </a:r>
           </a:p>
         </p:txBody>
@@ -11186,14 +10077,6 @@
   <p:clrMapOvr>
     <a:overrideClrMapping bg1="lt1" tx1="dk1" bg2="lt2" tx2="dk2" accent1="accent1" accent2="accent2" accent3="accent3" accent4="accent4" accent5="accent5" accent6="accent6" hlink="hlink" folHlink="folHlink"/>
   </p:clrMapOvr>
-  <mc:AlternateContent xmlns:mc="http://schemas.openxmlformats.org/markup-compatibility/2006" xmlns:p14="http://schemas.microsoft.com/office/powerpoint/2010/main">
-    <mc:Choice Requires="p14">
-      <p:transition spd="slow" p14:dur="2000"/>
-    </mc:Choice>
-    <mc:Fallback xmlns="">
-      <p:transition spd="slow"/>
-    </mc:Fallback>
-  </mc:AlternateContent>
   <p:timing>
     <p:tnLst>
       <p:par>
@@ -11393,30 +10276,12 @@
           <a:lstStyle/>
           <a:p>
             <a:r>
-              <a:rPr lang="en-US" sz="3200" dirty="0" smtClean="0">
-                <a:latin typeface="+mj-lt"/>
-                <a:cs typeface="B Titr" panose="00000700000000000000" pitchFamily="2" charset="-78"/>
-              </a:rPr>
-              <a:t>PWM: </a:t>
-            </a:r>
-            <a:r>
               <a:rPr lang="en-US" sz="3200" dirty="0">
                 <a:latin typeface="+mj-lt"/>
                 <a:cs typeface="B Titr" panose="00000700000000000000" pitchFamily="2" charset="-78"/>
               </a:rPr>
-              <a:t>An </a:t>
-            </a:r>
-            <a:r>
-              <a:rPr lang="en-US" sz="3200" dirty="0" smtClean="0">
-                <a:latin typeface="+mj-lt"/>
-                <a:cs typeface="B Titr" panose="00000700000000000000" pitchFamily="2" charset="-78"/>
-              </a:rPr>
-              <a:t>Example</a:t>
-            </a:r>
-            <a:endParaRPr lang="en-US" sz="3200" dirty="0">
-              <a:latin typeface="+mj-lt"/>
-              <a:cs typeface="B Titr" panose="00000700000000000000" pitchFamily="2" charset="-78"/>
-            </a:endParaRPr>
+              <a:t>PWM: An Example</a:t>
+            </a:r>
           </a:p>
         </p:txBody>
       </p:sp>
@@ -11477,14 +10342,11 @@
           <a:p>
             <a:pPr algn="ctr" rtl="1"/>
             <a:r>
-              <a:rPr lang="en-US" sz="1400" dirty="0" smtClean="0">
+              <a:rPr lang="en-US" sz="1400" dirty="0">
                 <a:cs typeface="B Titr" panose="00000700000000000000" pitchFamily="2" charset="-78"/>
               </a:rPr>
               <a:t>Microprocessors and Assembly Language, Fall 2024, AUT, Tehran, Iran </a:t>
             </a:r>
-            <a:endParaRPr lang="en-US" sz="1400" dirty="0">
-              <a:cs typeface="B Titr" panose="00000700000000000000" pitchFamily="2" charset="-78"/>
-            </a:endParaRPr>
           </a:p>
         </p:txBody>
       </p:sp>
@@ -11515,21 +10377,13 @@
                 <a:spcPct val="150000"/>
               </a:lnSpc>
             </a:pPr>
-            <a:r>
-              <a:rPr lang="en-US" sz="2000" dirty="0"/>
-              <a:t/>
-            </a:r>
             <a:br>
               <a:rPr lang="en-US" sz="2000" dirty="0"/>
             </a:br>
-            <a:r>
-              <a:rPr lang="en-US" sz="2000" dirty="0"/>
-              <a:t/>
-            </a:r>
             <a:br>
               <a:rPr lang="en-US" sz="2000" dirty="0"/>
             </a:br>
-            <a:endParaRPr lang="en-US" sz="2000" b="1" dirty="0" smtClean="0">
+            <a:endParaRPr lang="en-US" sz="2000" b="1" dirty="0">
               <a:solidFill>
                 <a:srgbClr val="00B050"/>
               </a:solidFill>
@@ -11567,16 +10421,8 @@
               <a:buChar char="•"/>
             </a:pPr>
             <a:r>
-              <a:rPr lang="en-US" b="1" dirty="0" smtClean="0"/>
-              <a:t>Controlling </a:t>
-            </a:r>
-            <a:r>
               <a:rPr lang="en-US" b="1" dirty="0"/>
-              <a:t>the brightness of an LED by adjusting the duty </a:t>
-            </a:r>
-            <a:r>
-              <a:rPr lang="en-US" b="1" dirty="0" smtClean="0"/>
-              <a:t>cycle</a:t>
+              <a:t>Controlling the brightness of an LED by adjusting the duty cycle</a:t>
             </a:r>
           </a:p>
           <a:p>
@@ -11591,7 +10437,6 @@
               <a:rPr lang="en-US" b="1" dirty="0"/>
               <a:t>With an RGB (red green blue) LED, </a:t>
             </a:r>
-            <a:endParaRPr lang="en-US" b="1" dirty="0" smtClean="0"/>
           </a:p>
           <a:p>
             <a:pPr marL="800100" lvl="1" indent="-342900">
@@ -11602,16 +10447,8 @@
               <a:buChar char="•"/>
             </a:pPr>
             <a:r>
-              <a:rPr lang="en-US" sz="1600" b="1" dirty="0" smtClean="0"/>
-              <a:t>you </a:t>
-            </a:r>
-            <a:r>
               <a:rPr lang="en-US" sz="1600" b="1" dirty="0"/>
-              <a:t>can control how much of each of the three colors you want in the mix of color by dimming them with various </a:t>
-            </a:r>
-            <a:r>
-              <a:rPr lang="en-US" sz="1600" b="1" dirty="0" smtClean="0"/>
-              <a:t>amounts</a:t>
+              <a:t>you can control how much of each of the three colors you want in the mix of color by dimming them with various amounts</a:t>
             </a:r>
           </a:p>
           <a:p>
@@ -11622,7 +10459,7 @@
               <a:buFont typeface="Arial" panose="020B0604020202020204" pitchFamily="34" charset="0"/>
               <a:buChar char="•"/>
             </a:pPr>
-            <a:endParaRPr lang="en-US" sz="2000" b="1" dirty="0" smtClean="0"/>
+            <a:endParaRPr lang="en-US" sz="2000" b="1" dirty="0"/>
           </a:p>
         </p:txBody>
       </p:sp>
@@ -11750,14 +10587,6 @@
   <p:clrMapOvr>
     <a:overrideClrMapping bg1="lt1" tx1="dk1" bg2="lt2" tx2="dk2" accent1="accent1" accent2="accent2" accent3="accent3" accent4="accent4" accent5="accent5" accent6="accent6" hlink="hlink" folHlink="folHlink"/>
   </p:clrMapOvr>
-  <mc:AlternateContent xmlns:mc="http://schemas.openxmlformats.org/markup-compatibility/2006" xmlns:p14="http://schemas.microsoft.com/office/powerpoint/2010/main">
-    <mc:Choice Requires="p14">
-      <p:transition spd="slow" p14:dur="2000"/>
-    </mc:Choice>
-    <mc:Fallback xmlns="">
-      <p:transition spd="slow"/>
-    </mc:Fallback>
-  </mc:AlternateContent>
   <p:timing>
     <p:tnLst>
       <p:par>
@@ -11962,16 +10791,12 @@
           <a:lstStyle/>
           <a:p>
             <a:r>
-              <a:rPr lang="en-US" sz="3200" dirty="0" smtClean="0">
+              <a:rPr lang="en-US" sz="3200" dirty="0">
                 <a:latin typeface="+mj-lt"/>
                 <a:cs typeface="B Titr" panose="00000700000000000000" pitchFamily="2" charset="-78"/>
               </a:rPr>
               <a:t>PWM in SAM3X</a:t>
             </a:r>
-            <a:endParaRPr lang="en-US" sz="3200" dirty="0">
-              <a:latin typeface="+mj-lt"/>
-              <a:cs typeface="B Titr" panose="00000700000000000000" pitchFamily="2" charset="-78"/>
-            </a:endParaRPr>
           </a:p>
         </p:txBody>
       </p:sp>
@@ -12032,14 +10857,11 @@
           <a:p>
             <a:pPr algn="ctr" rtl="1"/>
             <a:r>
-              <a:rPr lang="en-US" sz="1400" dirty="0" smtClean="0">
+              <a:rPr lang="en-US" sz="1400" dirty="0">
                 <a:cs typeface="B Titr" panose="00000700000000000000" pitchFamily="2" charset="-78"/>
               </a:rPr>
               <a:t>Microprocessors and Assembly Language, Fall 2024, AUT, Tehran, Iran </a:t>
             </a:r>
-            <a:endParaRPr lang="en-US" sz="1400" dirty="0">
-              <a:cs typeface="B Titr" panose="00000700000000000000" pitchFamily="2" charset="-78"/>
-            </a:endParaRPr>
           </a:p>
         </p:txBody>
       </p:sp>
@@ -12070,21 +10892,13 @@
                 <a:spcPct val="150000"/>
               </a:lnSpc>
             </a:pPr>
-            <a:r>
-              <a:rPr lang="en-US" sz="2000" dirty="0"/>
-              <a:t/>
-            </a:r>
             <a:br>
               <a:rPr lang="en-US" sz="2000" dirty="0"/>
             </a:br>
-            <a:r>
-              <a:rPr lang="en-US" sz="2000" dirty="0"/>
-              <a:t/>
-            </a:r>
             <a:br>
               <a:rPr lang="en-US" sz="2000" dirty="0"/>
             </a:br>
-            <a:endParaRPr lang="en-US" sz="2000" b="1" dirty="0" smtClean="0">
+            <a:endParaRPr lang="en-US" sz="2000" b="1" dirty="0">
               <a:solidFill>
                 <a:srgbClr val="00B050"/>
               </a:solidFill>
@@ -12131,13 +10945,8 @@
             </a:r>
             <a:r>
               <a:rPr lang="en-US" b="1" dirty="0"/>
-              <a:t> controls 8 channels </a:t>
-            </a:r>
-            <a:r>
-              <a:rPr lang="en-US" b="1" dirty="0" smtClean="0"/>
-              <a:t>independently</a:t>
-            </a:r>
-            <a:endParaRPr lang="en-US" b="1" dirty="0"/>
+              <a:t> controls 8 channels independently</a:t>
+            </a:r>
           </a:p>
           <a:p>
             <a:pPr marL="800100" lvl="1" indent="-342900">
@@ -12149,11 +10958,7 @@
             </a:pPr>
             <a:r>
               <a:rPr lang="en-US" b="1" dirty="0"/>
-              <a:t>Each channel controls two complementary square </a:t>
-            </a:r>
-            <a:r>
-              <a:rPr lang="en-US" b="1" dirty="0" smtClean="0"/>
-              <a:t>output waveforms</a:t>
+              <a:t>Each channel controls two complementary square output waveforms</a:t>
             </a:r>
           </a:p>
           <a:p>
@@ -12166,11 +10971,7 @@
             </a:pPr>
             <a:r>
               <a:rPr lang="en-US" sz="2000" b="1" dirty="0"/>
-              <a:t>Embedded </a:t>
-            </a:r>
-            <a:r>
-              <a:rPr lang="en-US" sz="2000" b="1" dirty="0" smtClean="0"/>
-              <a:t>Characteristics</a:t>
+              <a:t>Embedded Characteristics</a:t>
             </a:r>
           </a:p>
           <a:p>
@@ -12183,11 +10984,7 @@
             </a:pPr>
             <a:r>
               <a:rPr lang="en-US" b="1" dirty="0"/>
-              <a:t>Common Clock Generator Providing Thirteen Different </a:t>
-            </a:r>
-            <a:r>
-              <a:rPr lang="en-US" b="1" dirty="0" smtClean="0"/>
-              <a:t>Clocks</a:t>
+              <a:t>Common Clock Generator Providing Thirteen Different Clocks</a:t>
             </a:r>
           </a:p>
           <a:p>
@@ -12200,11 +10997,7 @@
             </a:pPr>
             <a:r>
               <a:rPr lang="en-US" sz="1600" b="1" dirty="0"/>
-              <a:t>A Modulo n Counter Providing Eleven </a:t>
-            </a:r>
-            <a:r>
-              <a:rPr lang="en-US" sz="1600" b="1" dirty="0" smtClean="0"/>
-              <a:t>Clocks</a:t>
+              <a:t>A Modulo n Counter Providing Eleven Clocks</a:t>
             </a:r>
           </a:p>
           <a:p>
@@ -12217,11 +11010,7 @@
             </a:pPr>
             <a:r>
               <a:rPr lang="en-US" sz="1600" b="1" dirty="0"/>
-              <a:t>Two Independent Linear Dividers Working on Modulo n Counter </a:t>
-            </a:r>
-            <a:r>
-              <a:rPr lang="en-US" sz="1600" b="1" dirty="0" smtClean="0"/>
-              <a:t>Outputs</a:t>
+              <a:t>Two Independent Linear Dividers Working on Modulo n Counter Outputs</a:t>
             </a:r>
           </a:p>
           <a:p>
@@ -12234,11 +11023,7 @@
             </a:pPr>
             <a:r>
               <a:rPr lang="en-US" sz="1600" b="1" dirty="0"/>
-              <a:t>Independent Clock Selection for Each </a:t>
-            </a:r>
-            <a:r>
-              <a:rPr lang="en-US" sz="1600" b="1" dirty="0" smtClean="0"/>
-              <a:t>Channel</a:t>
+              <a:t>Independent Clock Selection for Each Channel</a:t>
             </a:r>
           </a:p>
           <a:p>
@@ -12260,7 +11045,7 @@
                 <a:spcPct val="150000"/>
               </a:lnSpc>
             </a:pPr>
-            <a:endParaRPr lang="en-US" sz="1600" b="1" dirty="0" smtClean="0"/>
+            <a:endParaRPr lang="en-US" sz="1600" b="1" dirty="0"/>
           </a:p>
         </p:txBody>
       </p:sp>
@@ -12305,14 +11090,6 @@
   <p:clrMapOvr>
     <a:overrideClrMapping bg1="lt1" tx1="dk1" bg2="lt2" tx2="dk2" accent1="accent1" accent2="accent2" accent3="accent3" accent4="accent4" accent5="accent5" accent6="accent6" hlink="hlink" folHlink="folHlink"/>
   </p:clrMapOvr>
-  <mc:AlternateContent xmlns:mc="http://schemas.openxmlformats.org/markup-compatibility/2006" xmlns:p14="http://schemas.microsoft.com/office/powerpoint/2010/main">
-    <mc:Choice Requires="p14">
-      <p:transition spd="slow" p14:dur="2000"/>
-    </mc:Choice>
-    <mc:Fallback xmlns="">
-      <p:transition spd="slow"/>
-    </mc:Fallback>
-  </mc:AlternateContent>
   <p:timing>
     <p:tnLst>
       <p:par>
@@ -12883,18 +11660,11 @@
           <a:lstStyle/>
           <a:p>
             <a:r>
-              <a:rPr lang="en-US" sz="3200" dirty="0" smtClean="0">
-                <a:latin typeface="+mj-lt"/>
-                <a:cs typeface="B Titr" panose="00000700000000000000" pitchFamily="2" charset="-78"/>
-              </a:rPr>
-              <a:t>PWM </a:t>
-            </a:r>
-            <a:r>
               <a:rPr lang="en-US" sz="3200" dirty="0">
                 <a:latin typeface="+mj-lt"/>
                 <a:cs typeface="B Titr" panose="00000700000000000000" pitchFamily="2" charset="-78"/>
               </a:rPr>
-              <a:t>in SAM3X</a:t>
+              <a:t>PWM in SAM3X</a:t>
             </a:r>
           </a:p>
         </p:txBody>
@@ -12956,14 +11726,11 @@
           <a:p>
             <a:pPr algn="ctr" rtl="1"/>
             <a:r>
-              <a:rPr lang="en-US" sz="1400" dirty="0" smtClean="0">
+              <a:rPr lang="en-US" sz="1400" dirty="0">
                 <a:cs typeface="B Titr" panose="00000700000000000000" pitchFamily="2" charset="-78"/>
               </a:rPr>
               <a:t>Microprocessors and Assembly Language, Fall 2024, AUT, Tehran, Iran </a:t>
             </a:r>
-            <a:endParaRPr lang="en-US" sz="1400" dirty="0">
-              <a:cs typeface="B Titr" panose="00000700000000000000" pitchFamily="2" charset="-78"/>
-            </a:endParaRPr>
           </a:p>
         </p:txBody>
       </p:sp>
@@ -12994,21 +11761,13 @@
                 <a:spcPct val="150000"/>
               </a:lnSpc>
             </a:pPr>
-            <a:r>
-              <a:rPr lang="en-US" sz="2000" dirty="0"/>
-              <a:t/>
-            </a:r>
             <a:br>
               <a:rPr lang="en-US" sz="2000" dirty="0"/>
             </a:br>
-            <a:r>
-              <a:rPr lang="en-US" sz="2000" dirty="0"/>
-              <a:t/>
-            </a:r>
             <a:br>
               <a:rPr lang="en-US" sz="2000" dirty="0"/>
             </a:br>
-            <a:endParaRPr lang="en-US" sz="2000" b="1" dirty="0" smtClean="0">
+            <a:endParaRPr lang="en-US" sz="2000" b="1" dirty="0">
               <a:solidFill>
                 <a:srgbClr val="00B050"/>
               </a:solidFill>
@@ -13049,7 +11808,7 @@
               <a:rPr lang="en-US" b="1" dirty="0"/>
               <a:t>PWM Clock Generator</a:t>
             </a:r>
-            <a:endParaRPr lang="en-US" sz="1600" b="1" dirty="0" smtClean="0"/>
+            <a:endParaRPr lang="en-US" sz="1600" b="1" dirty="0"/>
           </a:p>
         </p:txBody>
       </p:sp>
@@ -13145,21 +11904,6 @@
   <p:clrMapOvr>
     <a:overrideClrMapping bg1="lt1" tx1="dk1" bg2="lt2" tx2="dk2" accent1="accent1" accent2="accent2" accent3="accent3" accent4="accent4" accent5="accent5" accent6="accent6" hlink="hlink" folHlink="folHlink"/>
   </p:clrMapOvr>
-  <mc:AlternateContent xmlns:mc="http://schemas.openxmlformats.org/markup-compatibility/2006" xmlns:p14="http://schemas.microsoft.com/office/powerpoint/2010/main">
-    <mc:Choice Requires="p14">
-      <p:transition spd="slow" p14:dur="2000"/>
-    </mc:Choice>
-    <mc:Fallback xmlns="">
-      <p:transition spd="slow"/>
-    </mc:Fallback>
-  </mc:AlternateContent>
-  <p:timing>
-    <p:tnLst>
-      <p:par>
-        <p:cTn id="1" dur="indefinite" restart="never" nodeType="tmRoot"/>
-      </p:par>
-    </p:tnLst>
-  </p:timing>
 </p:sld>
 </file>
 
